--- a/docs/slides/pptx/M4-doing.pptx
+++ b/docs/slides/pptx/M4-doing.pptx
@@ -16,6 +16,8 @@
     <p:sldId id="264" r:id="rId16"/>
     <p:sldId id="265" r:id="rId17"/>
     <p:sldId id="266" r:id="rId18"/>
+    <p:sldId id="267" r:id="rId19"/>
+    <p:sldId id="268" r:id="rId20"/>
   </p:sldIdLst>
   <p:sldSz cx="12191695" cy="6858000" type="screen4x3"/>
   <p:notesSz cx="6858000" cy="9144000"/>
@@ -582,42 +584,7 @@
           <a:lstStyle/>
           <a:p>
             <a:r>
-              <a:t>This is most of the 10-minute instructor block, so let the tool loop scroll and narrate the calls as they land. Run it once against gpt-5.5 on Foundry; the measured behavior (7 to 8 calls, zero nudges) is in dotnet/F10-dotnet.md.</a:t>
-            </a:r>
-          </a:p>
-          <a:p>
-            <a:r>
-              <a:t>Demo script (the demo outline that used to live in the spec, sized for the 10-minute block: step 4 is the first thing to skip if you are running long):</a:t>
-            </a:r>
-          </a:p>
-          <a:p>
-            <a:r>
-              <a:t>1. Type the trip request into a plain chat completion first. You get a lovely generic itinerary that ignores the washed-out bridge and books nothing, which is the reason this feature exists.</a:t>
-            </a:r>
-          </a:p>
-          <a:p>
-            <a:r>
-              <a:t>2. Show the five tools as ordinary C# methods over the mock APIs in data/mock-apis/ and the corpus: search_trails, get_weather, check_campsites, request_permit, and get_trail_conditions. Register them with Microsoft.Extensions.AI's function-calling support; the descriptions you write are the model's only manual. get_trail_conditions reads the same condition reports feature 08 mined, which is how the agent can find out a bridge is gone.</a:t>
-            </a:r>
-          </a:p>
-          <a:p>
-            <a:r>
-              <a:t>3. Run the agent and narrate the loop live as each call scrolls past: weather first, then trail search, then a conditions check that discovers the feature 08 bridge washout and routes around it. The payoff is watching the model sequence tools nobody ordered it to sequence.</a:t>
-            </a:r>
-          </a:p>
-          <a:p>
-            <a:r>
-              <a:t>4. Show the full trace, then break something on purpose: mark the campsites full and re-run. The agent adapts and proposes different dates.</a:t>
-            </a:r>
-          </a:p>
-          <a:p>
-            <a:r>
-              <a:t>5. The permit step hits the feature 09 gate: the agent pauses, presents the summary, and waits for a human yes before filing. Show the step budget in the loop while you're there.</a:t>
-            </a:r>
-          </a:p>
-          <a:p>
-            <a:r>
-              <a:t>6. Close on the trace as an artifact: every tool call, its arguments, and its result printed as the loop runs, so every decision is inspectable rather than mysterious. Be precise about what this demo does and doesn't do: it prints the trace, and it does not persist one. Shipping this means writing that trace to durable storage alongside the approval record from feature 09, and that pair is what you show your security team when they ask whether this thing is safe.</a:t>
+              <a:t>Trace one iteration with your finger: model, tool, result back in, model. Then say the loop runs seven or eight times for this request.</a:t>
             </a:r>
           </a:p>
         </p:txBody>
@@ -687,7 +654,7 @@
           <a:lstStyle/>
           <a:p>
             <a:r>
-              <a:t>These counts are in dotnet/F10-dotnet.md as measured fact. They are the honest answer to "should we ship an agent?" Yes: with a step budget, validated arguments, tools that return errors, a persisted trace, and a human approving anything irreversible. Which is to say, with feature 09.</a:t>
+              <a:t>This is the "why not just RAG" slide. The trip request needs weather before it can pick a trail and conditions before it can book, and nobody knows that order up front. That is the whole case for the loop.</a:t>
             </a:r>
           </a:p>
         </p:txBody>
@@ -757,7 +724,42 @@
           <a:lstStyle/>
           <a:p>
             <a:r>
-              <a:t>Measured against the workshop's Microsoft Foundry deployment (gpt-4.1): every run sequenced weather, search, conditions on every candidate, campsites, then the permit only when needed, with zero nudges, in all three languages; the closed-trail request checked trail-0117 first and planned around the closure. Say that plainly; the contrast with the local counts on the previous slide is the argument.</a:t>
+              <a:t>This is most of the 10-minute instructor block, so let the tool loop scroll and narrate the calls as they land. Run it once against gpt-5.5 on Foundry; the measured behavior (7 to 8 calls, zero nudges) is in dotnet/F10-dotnet.md.</a:t>
+            </a:r>
+          </a:p>
+          <a:p>
+            <a:r>
+              <a:t>Demo script (the demo outline that used to live in the spec, sized for the 10-minute block: step 4 is the first thing to skip if you are running long):</a:t>
+            </a:r>
+          </a:p>
+          <a:p>
+            <a:r>
+              <a:t>1. Type the trip request into a plain chat completion first. You get a lovely generic itinerary that ignores the washed-out bridge and books nothing, which is the reason this feature exists.</a:t>
+            </a:r>
+          </a:p>
+          <a:p>
+            <a:r>
+              <a:t>2. Show the five tools as ordinary C# methods over the mock APIs in data/mock-apis/ and the corpus: search_trails, get_weather, check_campsites, request_permit, and get_trail_conditions. Register them with Microsoft.Extensions.AI's function-calling support; the descriptions you write are the model's only manual. get_trail_conditions reads the same condition reports feature 08 mined, which is how the agent can find out a bridge is gone.</a:t>
+            </a:r>
+          </a:p>
+          <a:p>
+            <a:r>
+              <a:t>3. Run the agent and narrate the loop live as each call scrolls past: weather first, then trail search, then a conditions check that discovers the feature 08 bridge washout and routes around it. The payoff is watching the model sequence tools nobody ordered it to sequence.</a:t>
+            </a:r>
+          </a:p>
+          <a:p>
+            <a:r>
+              <a:t>4. Show the full trace, then break something on purpose: mark the campsites full and re-run. The agent adapts and proposes different dates.</a:t>
+            </a:r>
+          </a:p>
+          <a:p>
+            <a:r>
+              <a:t>5. The permit step hits the feature 09 gate: the agent pauses, presents the summary, and waits for a human yes before filing. Show the step budget in the loop while you're there.</a:t>
+            </a:r>
+          </a:p>
+          <a:p>
+            <a:r>
+              <a:t>6. Close on the trace as an artifact: every tool call, its arguments, and its result printed as the loop runs, so every decision is inspectable rather than mysterious. Be precise about what this demo does and doesn't do: it prints the trace, and it does not persist one. Shipping this means writing that trace to durable storage alongside the approval record from feature 09, and that pair is what you show your security team when they ask whether this thing is safe.</a:t>
             </a:r>
           </a:p>
         </p:txBody>
@@ -827,7 +829,7 @@
           <a:lstStyle/>
           <a:p>
             <a:r>
-              <a:t>Row 10, and the one your board has already asked about.</a:t>
+              <a:t>These counts are in dotnet/F10-dotnet.md as measured fact. They are the honest answer to "should we ship an agent?" Yes: with a step budget, validated arguments, tools that return errors, a persisted trace, and a human approving anything irreversible. Which is to say, with feature 09.</a:t>
             </a:r>
           </a:p>
         </p:txBody>
@@ -853,6 +855,146 @@
 </file>
 
 <file path=ppt/notesSlides/notesSlide6.xml><?xml version="1.0" encoding="utf-8"?>
+<p:notes xmlns:a="http://schemas.openxmlformats.org/drawingml/2006/main" xmlns:p="http://schemas.openxmlformats.org/presentationml/2006/main" xmlns:r="http://schemas.openxmlformats.org/officeDocument/2006/relationships">
+  <p:cSld>
+    <p:spTree>
+      <p:nvGrpSpPr>
+        <p:cNvPr id="1" name=""/>
+        <p:cNvGrpSpPr/>
+        <p:nvPr/>
+      </p:nvGrpSpPr>
+      <p:grpSpPr>
+        <a:xfrm>
+          <a:off x="0" y="0"/>
+          <a:ext cx="0" cy="0"/>
+          <a:chOff x="0" y="0"/>
+          <a:chExt cx="0" cy="0"/>
+        </a:xfrm>
+      </p:grpSpPr>
+      <p:sp>
+        <p:nvSpPr>
+          <p:cNvPr id="2" name="Slide Image Placeholder 1"/>
+          <p:cNvSpPr>
+            <a:spLocks noGrp="1"/>
+          </p:cNvSpPr>
+          <p:nvPr>
+            <p:ph type="sldImg" idx="2"/>
+          </p:nvPr>
+        </p:nvSpPr>
+        <p:spPr/>
+      </p:sp>
+      <p:sp>
+        <p:nvSpPr>
+          <p:cNvPr id="3" name="Notes Placeholder 2"/>
+          <p:cNvSpPr>
+            <a:spLocks noGrp="1"/>
+          </p:cNvSpPr>
+          <p:nvPr>
+            <p:ph type="body" idx="3" sz="quarter"/>
+          </p:nvPr>
+        </p:nvSpPr>
+        <p:spPr/>
+        <p:txBody>
+          <a:bodyPr/>
+          <a:lstStyle/>
+          <a:p>
+            <a:r>
+              <a:t>Measured against the workshop's Microsoft Foundry deployment (gpt-4.1): every run sequenced weather, search, conditions on every candidate, campsites, then the permit only when needed, with zero nudges, in all three languages; the closed-trail request checked trail-0117 first and planned around the closure. Say that plainly; the contrast with the local counts on the previous slide is the argument.</a:t>
+            </a:r>
+          </a:p>
+        </p:txBody>
+      </p:sp>
+      <p:sp>
+        <p:nvSpPr>
+          <p:cNvPr id="4" name="Slide Number Placeholder 3"/>
+          <p:cNvSpPr>
+            <a:spLocks noGrp="1"/>
+          </p:cNvSpPr>
+          <p:nvPr>
+            <p:ph type="sldNum" idx="5" sz="quarter"/>
+          </p:nvPr>
+        </p:nvSpPr>
+        <p:spPr/>
+      </p:sp>
+    </p:spTree>
+  </p:cSld>
+  <p:clrMapOvr>
+    <a:masterClrMapping/>
+  </p:clrMapOvr>
+</p:notes>
+</file>
+
+<file path=ppt/notesSlides/notesSlide7.xml><?xml version="1.0" encoding="utf-8"?>
+<p:notes xmlns:a="http://schemas.openxmlformats.org/drawingml/2006/main" xmlns:p="http://schemas.openxmlformats.org/presentationml/2006/main" xmlns:r="http://schemas.openxmlformats.org/officeDocument/2006/relationships">
+  <p:cSld>
+    <p:spTree>
+      <p:nvGrpSpPr>
+        <p:cNvPr id="1" name=""/>
+        <p:cNvGrpSpPr/>
+        <p:nvPr/>
+      </p:nvGrpSpPr>
+      <p:grpSpPr>
+        <a:xfrm>
+          <a:off x="0" y="0"/>
+          <a:ext cx="0" cy="0"/>
+          <a:chOff x="0" y="0"/>
+          <a:chExt cx="0" cy="0"/>
+        </a:xfrm>
+      </p:grpSpPr>
+      <p:sp>
+        <p:nvSpPr>
+          <p:cNvPr id="2" name="Slide Image Placeholder 1"/>
+          <p:cNvSpPr>
+            <a:spLocks noGrp="1"/>
+          </p:cNvSpPr>
+          <p:nvPr>
+            <p:ph type="sldImg" idx="2"/>
+          </p:nvPr>
+        </p:nvSpPr>
+        <p:spPr/>
+      </p:sp>
+      <p:sp>
+        <p:nvSpPr>
+          <p:cNvPr id="3" name="Notes Placeholder 2"/>
+          <p:cNvSpPr>
+            <a:spLocks noGrp="1"/>
+          </p:cNvSpPr>
+          <p:nvPr>
+            <p:ph type="body" idx="3" sz="quarter"/>
+          </p:nvPr>
+        </p:nvSpPr>
+        <p:spPr/>
+        <p:txBody>
+          <a:bodyPr/>
+          <a:lstStyle/>
+          <a:p>
+            <a:r>
+              <a:t>Row 10, and the one your board has already asked about.</a:t>
+            </a:r>
+          </a:p>
+        </p:txBody>
+      </p:sp>
+      <p:sp>
+        <p:nvSpPr>
+          <p:cNvPr id="4" name="Slide Number Placeholder 3"/>
+          <p:cNvSpPr>
+            <a:spLocks noGrp="1"/>
+          </p:cNvSpPr>
+          <p:nvPr>
+            <p:ph type="sldNum" idx="5" sz="quarter"/>
+          </p:nvPr>
+        </p:nvSpPr>
+        <p:spPr/>
+      </p:sp>
+    </p:spTree>
+  </p:cSld>
+  <p:clrMapOvr>
+    <a:masterClrMapping/>
+  </p:clrMapOvr>
+</p:notes>
+</file>
+
+<file path=ppt/notesSlides/notesSlide8.xml><?xml version="1.0" encoding="utf-8"?>
 <p:notes xmlns:a="http://schemas.openxmlformats.org/drawingml/2006/main" xmlns:p="http://schemas.openxmlformats.org/presentationml/2006/main" xmlns:r="http://schemas.openxmlformats.org/officeDocument/2006/relationships">
   <p:cSld>
     <p:spTree>
@@ -4004,7 +4146,7 @@
           <a:lstStyle/>
           <a:p>
             <a:r>
-              <a:t>Hands-On: 50 Minutes</a:t>
+              <a:t>10 · Why This One Pays for a Frontier Model</a:t>
             </a:r>
           </a:p>
         </p:txBody>
@@ -4022,7 +4164,7 @@
         <p:spPr>
           <a:xfrm>
             <a:off x="612648" y="1600200"/>
-            <a:ext cx="10966399" cy="4800600"/>
+            <a:ext cx="10966399" cy="4892040"/>
           </a:xfrm>
         </p:spPr>
         <p:txBody>
@@ -4032,42 +4174,21 @@
             <a:pPr/>
             <a:r>
               <a:rPr sz="2000"/>
-              <a:t>http/azure.http: you are the loop. Send the request with the tools array, read the tool call out of the response, send the follow-up with the tool result.</a:t>
+              <a:t>The only feature today where the workshop pays for a cloud model rather than running local</a:t>
             </a:r>
           </a:p>
           <a:p>
             <a:pPr/>
             <a:r>
               <a:rPr sz="2000"/>
-              <a:t>Step 1: the two-tool round-trip (search_trails, check_campsites) is written out for you</a:t>
+              <a:t>The reason is the numbers on the previous slide</a:t>
             </a:r>
           </a:p>
           <a:p>
             <a:pPr/>
             <a:r>
               <a:rPr sz="2000"/>
-              <a:t>Step 2: write the get_weather definition yourself; the itinerary should do something about the 16th</a:t>
-            </a:r>
-          </a:p>
-          <a:p>
-            <a:pPr/>
-            <a:r>
-              <a:rPr sz="2000"/>
-              <a:t>Step 3: ask for a trip on trail-0117; the itinerary should drop or flag it, for a reason that came from the tool</a:t>
-            </a:r>
-          </a:p>
-          <a:p>
-            <a:pPr/>
-            <a:r>
-              <a:rPr sz="2000"/>
-              <a:t>Stretch: the human gate before request_permit</a:t>
-            </a:r>
-          </a:p>
-          <a:p>
-            <a:pPr/>
-            <a:r>
-              <a:rPr sz="2000"/>
-              <a:t>reference-transcript.md is a complete known-good run to compare against when yours goes sideways. It will.</a:t>
+              <a:t>On Azure the loop should sequence all five tools from a single request, with no nudges</a:t>
             </a:r>
           </a:p>
         </p:txBody>
@@ -4111,6 +4232,199 @@
           <a:lstStyle/>
           <a:p>
             <a:r>
+              <a:t>10 · Leadership Card</a:t>
+            </a:r>
+          </a:p>
+        </p:txBody>
+      </p:sp>
+      <p:sp>
+        <p:nvSpPr>
+          <p:cNvPr id="3" name="Content Placeholder 2"/>
+          <p:cNvSpPr>
+            <a:spLocks noGrp="1"/>
+          </p:cNvSpPr>
+          <p:nvPr>
+            <p:ph idx="1"/>
+          </p:nvPr>
+        </p:nvSpPr>
+        <p:spPr>
+          <a:xfrm>
+            <a:off x="612648" y="1600200"/>
+            <a:ext cx="10966399" cy="4892040"/>
+          </a:xfrm>
+        </p:spPr>
+        <p:txBody>
+          <a:bodyPr wrap="square"/>
+          <a:lstStyle/>
+          <a:p>
+            <a:pPr/>
+            <a:r>
+              <a:rPr sz="2000"/>
+              <a:t>When: multi-step workflows spanning systems where users state a goal and then do the clicking themselves. Trip planning, onboarding, procurement, incident response, report assembly.</a:t>
+            </a:r>
+          </a:p>
+          <a:p>
+            <a:pPr/>
+            <a:r>
+              <a:rPr sz="2000"/>
+              <a:t>Cost: the highest of the ten. Weeks to months, frontier-model API costs, real design work on guardrails, confirmation gates, observability. Do one of 01 to 09 first.</a:t>
+            </a:r>
+          </a:p>
+          <a:p>
+            <a:pPr/>
+            <a:r>
+              <a:rPr sz="2000"/>
+              <a:t>"Users state the goal in one sentence, the software does the clicking, and a human still signs off on anything that matters."</a:t>
+            </a:r>
+          </a:p>
+        </p:txBody>
+      </p:sp>
+    </p:spTree>
+  </p:cSld>
+  <p:clrMapOvr>
+    <a:masterClrMapping/>
+  </p:clrMapOvr>
+</p:sld>
+</file>
+
+<file path=ppt/slides/slide12.xml><?xml version="1.0" encoding="utf-8"?>
+<p:sld xmlns:a="http://schemas.openxmlformats.org/drawingml/2006/main" xmlns:p="http://schemas.openxmlformats.org/presentationml/2006/main" xmlns:r="http://schemas.openxmlformats.org/officeDocument/2006/relationships">
+  <p:cSld>
+    <p:spTree>
+      <p:nvGrpSpPr>
+        <p:cNvPr id="1" name=""/>
+        <p:cNvGrpSpPr/>
+        <p:nvPr/>
+      </p:nvGrpSpPr>
+      <p:grpSpPr/>
+      <p:sp>
+        <p:nvSpPr>
+          <p:cNvPr id="2" name="Title 1"/>
+          <p:cNvSpPr>
+            <a:spLocks noGrp="1"/>
+          </p:cNvSpPr>
+          <p:nvPr>
+            <p:ph type="title"/>
+          </p:nvPr>
+        </p:nvSpPr>
+        <p:spPr>
+          <a:xfrm>
+            <a:off x="612648" y="365760"/>
+            <a:ext cx="10966399" cy="1097280"/>
+          </a:xfrm>
+        </p:spPr>
+        <p:txBody>
+          <a:bodyPr/>
+          <a:lstStyle/>
+          <a:p>
+            <a:r>
+              <a:t>Hands-On: 50 Minutes</a:t>
+            </a:r>
+          </a:p>
+        </p:txBody>
+      </p:sp>
+      <p:sp>
+        <p:nvSpPr>
+          <p:cNvPr id="3" name="Content Placeholder 2"/>
+          <p:cNvSpPr>
+            <a:spLocks noGrp="1"/>
+          </p:cNvSpPr>
+          <p:nvPr>
+            <p:ph idx="1"/>
+          </p:nvPr>
+        </p:nvSpPr>
+        <p:spPr>
+          <a:xfrm>
+            <a:off x="612648" y="1600200"/>
+            <a:ext cx="10966399" cy="4892040"/>
+          </a:xfrm>
+        </p:spPr>
+        <p:txBody>
+          <a:bodyPr wrap="square"/>
+          <a:lstStyle/>
+          <a:p>
+            <a:pPr/>
+            <a:r>
+              <a:rPr sz="2000"/>
+              <a:t>http/azure.http: you are the loop. Send the request with the tools array, read the tool call out of the response, send the follow-up with the tool result.</a:t>
+            </a:r>
+          </a:p>
+          <a:p>
+            <a:pPr/>
+            <a:r>
+              <a:rPr sz="2000"/>
+              <a:t>Step 1: the two-tool round-trip (search_trails, check_campsites) is written out for you</a:t>
+            </a:r>
+          </a:p>
+          <a:p>
+            <a:pPr/>
+            <a:r>
+              <a:rPr sz="2000"/>
+              <a:t>Step 2: write the get_weather definition yourself; the itinerary should do something about the 16th</a:t>
+            </a:r>
+          </a:p>
+          <a:p>
+            <a:pPr/>
+            <a:r>
+              <a:rPr sz="2000"/>
+              <a:t>Step 3: ask for a trip on trail-0117; the itinerary should drop or flag it, for a reason that came from the tool</a:t>
+            </a:r>
+          </a:p>
+          <a:p>
+            <a:pPr/>
+            <a:r>
+              <a:rPr sz="2000"/>
+              <a:t>Stretch: the human gate before request_permit</a:t>
+            </a:r>
+          </a:p>
+          <a:p>
+            <a:pPr/>
+            <a:r>
+              <a:rPr sz="2000"/>
+              <a:t>reference-transcript.md is a complete known-good run to compare against when yours goes sideways. It will.</a:t>
+            </a:r>
+          </a:p>
+        </p:txBody>
+      </p:sp>
+    </p:spTree>
+  </p:cSld>
+  <p:clrMapOvr>
+    <a:masterClrMapping/>
+  </p:clrMapOvr>
+</p:sld>
+</file>
+
+<file path=ppt/slides/slide13.xml><?xml version="1.0" encoding="utf-8"?>
+<p:sld xmlns:a="http://schemas.openxmlformats.org/drawingml/2006/main" xmlns:p="http://schemas.openxmlformats.org/presentationml/2006/main" xmlns:r="http://schemas.openxmlformats.org/officeDocument/2006/relationships">
+  <p:cSld>
+    <p:spTree>
+      <p:nvGrpSpPr>
+        <p:cNvPr id="1" name=""/>
+        <p:cNvGrpSpPr/>
+        <p:nvPr/>
+      </p:nvGrpSpPr>
+      <p:grpSpPr/>
+      <p:sp>
+        <p:nvSpPr>
+          <p:cNvPr id="2" name="Title 1"/>
+          <p:cNvSpPr>
+            <a:spLocks noGrp="1"/>
+          </p:cNvSpPr>
+          <p:nvPr>
+            <p:ph type="title"/>
+          </p:nvPr>
+        </p:nvSpPr>
+        <p:spPr>
+          <a:xfrm>
+            <a:off x="612648" y="365760"/>
+            <a:ext cx="10966399" cy="1097280"/>
+          </a:xfrm>
+        </p:spPr>
+        <p:txBody>
+          <a:bodyPr/>
+          <a:lstStyle/>
+          <a:p>
+            <a:r>
               <a:t>Debrief</a:t>
             </a:r>
           </a:p>
@@ -4129,7 +4443,7 @@
         <p:spPr>
           <a:xfrm>
             <a:off x="612648" y="1600200"/>
-            <a:ext cx="10966399" cy="4800600"/>
+            <a:ext cx="10966399" cy="4892040"/>
           </a:xfrm>
         </p:spPr>
         <p:txBody>
@@ -4215,7 +4529,7 @@
         <p:spPr>
           <a:xfrm>
             <a:off x="612648" y="1600200"/>
-            <a:ext cx="10966399" cy="4800600"/>
+            <a:ext cx="10966399" cy="4892040"/>
           </a:xfrm>
         </p:spPr>
         <p:txBody>
@@ -4308,7 +4622,7 @@
         <p:spPr>
           <a:xfrm>
             <a:off x="612648" y="1600200"/>
-            <a:ext cx="10966399" cy="4800600"/>
+            <a:ext cx="10966399" cy="4892040"/>
           </a:xfrm>
         </p:spPr>
         <p:txBody>
@@ -4401,7 +4715,7 @@
         <p:spPr>
           <a:xfrm>
             <a:off x="612648" y="1600200"/>
-            <a:ext cx="10966399" cy="4800600"/>
+            <a:ext cx="10966399" cy="4892040"/>
           </a:xfrm>
         </p:spPr>
         <p:txBody>
@@ -4501,7 +4815,7 @@
         <p:spPr>
           <a:xfrm>
             <a:off x="612648" y="1600200"/>
-            <a:ext cx="10966399" cy="4800600"/>
+            <a:ext cx="10966399" cy="4892040"/>
           </a:xfrm>
         </p:spPr>
         <p:txBody>
@@ -4576,7 +4890,7 @@
           <a:lstStyle/>
           <a:p>
             <a:r>
-              <a:t>10 · Demo: What to Watch</a:t>
+              <a:t>10 · How the Loop Works</a:t>
             </a:r>
           </a:p>
         </p:txBody>
@@ -4593,8 +4907,8 @@
         </p:nvSpPr>
         <p:spPr>
           <a:xfrm>
-            <a:off x="612648" y="1600200"/>
-            <a:ext cx="10966399" cy="4800600"/>
+            <a:off x="612648" y="3337560"/>
+            <a:ext cx="10966399" cy="3154680"/>
           </a:xfrm>
         </p:spPr>
         <p:txBody>
@@ -4603,43 +4917,554 @@
           <a:p>
             <a:pPr/>
             <a:r>
-              <a:rPr sz="2000"/>
-              <a:t>Plain chat completion first: a lovely generic itinerary that ignores the bridge and books nothing</a:t>
+              <a:rPr sz="1600"/>
+              <a:t>The loop is in your code. The model only ever returns "call this with these arguments" or a final answer.</a:t>
             </a:r>
           </a:p>
           <a:p>
             <a:pPr/>
             <a:r>
-              <a:rPr sz="2000"/>
-              <a:t>The five tools as ordinary C# methods over the mock APIs: search_trails, get_weather, get_trail_conditions, check_campsites, request_permit. The descriptions are the model's only manual.</a:t>
+              <a:rPr sz="1600"/>
+              <a:t>Tools are ordinary methods; their descriptions are the model's manual</a:t>
             </a:r>
           </a:p>
           <a:p>
             <a:pPr/>
             <a:r>
-              <a:rPr sz="2000"/>
-              <a:t>Run the agent and narrate the loop: weather, then trails, then a conditions check that discovers the washout and routes around it</a:t>
-            </a:r>
-          </a:p>
-          <a:p>
-            <a:pPr/>
-            <a:r>
-              <a:rPr sz="2000"/>
-              <a:t>Two facts the agent has to discover, not be told: September 16 is the rain day (49/33, 70% precip, 18 mph); Avalanche Lake's bridge is out, and only get_trail_conditions says so</a:t>
-            </a:r>
-          </a:p>
-          <a:p>
-            <a:pPr/>
-            <a:r>
-              <a:rPr sz="2000"/>
-              <a:t>Break something: mark the campsites full, re-run, watch it adapt</a:t>
-            </a:r>
-          </a:p>
-          <a:p>
-            <a:pPr/>
-            <a:r>
-              <a:rPr sz="2000"/>
-              <a:t>The permit hits the 09 gate: summary on screen, wait for a yes</a:t>
+              <a:rPr sz="1600"/>
+              <a:t>Guardrails are boxes on this line: a step budget on the loop, an approval gate before request_permit</a:t>
+            </a:r>
+          </a:p>
+        </p:txBody>
+      </p:sp>
+      <p:sp>
+        <p:nvSpPr>
+          <p:cNvPr id="4" name="Rounded Rectangle 3"/>
+          <p:cNvSpPr/>
+          <p:nvPr/>
+        </p:nvSpPr>
+        <p:spPr>
+          <a:xfrm>
+            <a:off x="612648" y="1554480"/>
+            <a:ext cx="1484833" cy="1508760"/>
+          </a:xfrm>
+          <a:prstGeom prst="roundRect">
+            <a:avLst/>
+          </a:prstGeom>
+          <a:noFill/>
+          <a:ln w="19050">
+            <a:solidFill>
+              <a:srgbClr val="000000"/>
+            </a:solidFill>
+          </a:ln>
+          <a:effectLst/>
+        </p:spPr>
+        <p:style>
+          <a:lnRef idx="1">
+            <a:schemeClr val="accent1"/>
+          </a:lnRef>
+          <a:fillRef idx="3">
+            <a:schemeClr val="accent1"/>
+          </a:fillRef>
+          <a:effectRef idx="2">
+            <a:schemeClr val="accent1"/>
+          </a:effectRef>
+          <a:fontRef idx="minor">
+            <a:schemeClr val="lt1"/>
+          </a:fontRef>
+        </p:style>
+        <p:txBody>
+          <a:bodyPr rtlCol="0" anchor="ctr" wrap="square" lIns="73152" rIns="73152"/>
+          <a:lstStyle/>
+          <a:p>
+            <a:pPr algn="ctr"/>
+            <a:r>
+              <a:rPr sz="1300">
+                <a:solidFill>
+                  <a:srgbClr val="000000"/>
+                </a:solidFill>
+              </a:rPr>
+              <a:t>Trip request + tool descriptions</a:t>
+            </a:r>
+          </a:p>
+        </p:txBody>
+      </p:sp>
+      <p:sp>
+        <p:nvSpPr>
+          <p:cNvPr id="5" name="Right Arrow 4"/>
+          <p:cNvSpPr/>
+          <p:nvPr/>
+        </p:nvSpPr>
+        <p:spPr>
+          <a:xfrm>
+            <a:off x="2152345" y="2162556"/>
+            <a:ext cx="301752" cy="292608"/>
+          </a:xfrm>
+          <a:prstGeom prst="rightArrow">
+            <a:avLst/>
+          </a:prstGeom>
+          <a:solidFill>
+            <a:srgbClr val="000000"/>
+          </a:solidFill>
+          <a:ln>
+            <a:noFill/>
+          </a:ln>
+          <a:effectLst/>
+        </p:spPr>
+        <p:style>
+          <a:lnRef idx="1">
+            <a:schemeClr val="accent1"/>
+          </a:lnRef>
+          <a:fillRef idx="3">
+            <a:schemeClr val="accent1"/>
+          </a:fillRef>
+          <a:effectRef idx="2">
+            <a:schemeClr val="accent1"/>
+          </a:effectRef>
+          <a:fontRef idx="minor">
+            <a:schemeClr val="lt1"/>
+          </a:fontRef>
+        </p:style>
+        <p:txBody>
+          <a:bodyPr rtlCol="0" anchor="ctr"/>
+          <a:lstStyle/>
+          <a:p>
+            <a:pPr algn="ctr"/>
+          </a:p>
+        </p:txBody>
+      </p:sp>
+      <p:sp>
+        <p:nvSpPr>
+          <p:cNvPr id="6" name="Rounded Rectangle 5"/>
+          <p:cNvSpPr/>
+          <p:nvPr/>
+        </p:nvSpPr>
+        <p:spPr>
+          <a:xfrm>
+            <a:off x="2508961" y="1554480"/>
+            <a:ext cx="1484833" cy="1508760"/>
+          </a:xfrm>
+          <a:prstGeom prst="roundRect">
+            <a:avLst/>
+          </a:prstGeom>
+          <a:noFill/>
+          <a:ln w="19050">
+            <a:solidFill>
+              <a:srgbClr val="000000"/>
+            </a:solidFill>
+          </a:ln>
+          <a:effectLst/>
+        </p:spPr>
+        <p:style>
+          <a:lnRef idx="1">
+            <a:schemeClr val="accent1"/>
+          </a:lnRef>
+          <a:fillRef idx="3">
+            <a:schemeClr val="accent1"/>
+          </a:fillRef>
+          <a:effectRef idx="2">
+            <a:schemeClr val="accent1"/>
+          </a:effectRef>
+          <a:fontRef idx="minor">
+            <a:schemeClr val="lt1"/>
+          </a:fontRef>
+        </p:style>
+        <p:txBody>
+          <a:bodyPr rtlCol="0" anchor="ctr" wrap="square" lIns="73152" rIns="73152"/>
+          <a:lstStyle/>
+          <a:p>
+            <a:pPr algn="ctr"/>
+            <a:r>
+              <a:rPr sz="1300">
+                <a:solidFill>
+                  <a:srgbClr val="000000"/>
+                </a:solidFill>
+              </a:rPr>
+              <a:t>Model: call a tool, or answer</a:t>
+            </a:r>
+          </a:p>
+        </p:txBody>
+      </p:sp>
+      <p:sp>
+        <p:nvSpPr>
+          <p:cNvPr id="7" name="Right Arrow 6"/>
+          <p:cNvSpPr/>
+          <p:nvPr/>
+        </p:nvSpPr>
+        <p:spPr>
+          <a:xfrm>
+            <a:off x="4048658" y="2162556"/>
+            <a:ext cx="301752" cy="292608"/>
+          </a:xfrm>
+          <a:prstGeom prst="rightArrow">
+            <a:avLst/>
+          </a:prstGeom>
+          <a:solidFill>
+            <a:srgbClr val="000000"/>
+          </a:solidFill>
+          <a:ln>
+            <a:noFill/>
+          </a:ln>
+          <a:effectLst/>
+        </p:spPr>
+        <p:style>
+          <a:lnRef idx="1">
+            <a:schemeClr val="accent1"/>
+          </a:lnRef>
+          <a:fillRef idx="3">
+            <a:schemeClr val="accent1"/>
+          </a:fillRef>
+          <a:effectRef idx="2">
+            <a:schemeClr val="accent1"/>
+          </a:effectRef>
+          <a:fontRef idx="minor">
+            <a:schemeClr val="lt1"/>
+          </a:fontRef>
+        </p:style>
+        <p:txBody>
+          <a:bodyPr rtlCol="0" anchor="ctr"/>
+          <a:lstStyle/>
+          <a:p>
+            <a:pPr algn="ctr"/>
+          </a:p>
+        </p:txBody>
+      </p:sp>
+      <p:sp>
+        <p:nvSpPr>
+          <p:cNvPr id="8" name="Rounded Rectangle 7"/>
+          <p:cNvSpPr/>
+          <p:nvPr/>
+        </p:nvSpPr>
+        <p:spPr>
+          <a:xfrm>
+            <a:off x="4405274" y="1554480"/>
+            <a:ext cx="1484833" cy="1508760"/>
+          </a:xfrm>
+          <a:prstGeom prst="roundRect">
+            <a:avLst/>
+          </a:prstGeom>
+          <a:noFill/>
+          <a:ln w="19050">
+            <a:solidFill>
+              <a:srgbClr val="000000"/>
+            </a:solidFill>
+          </a:ln>
+          <a:effectLst/>
+        </p:spPr>
+        <p:style>
+          <a:lnRef idx="1">
+            <a:schemeClr val="accent1"/>
+          </a:lnRef>
+          <a:fillRef idx="3">
+            <a:schemeClr val="accent1"/>
+          </a:fillRef>
+          <a:effectRef idx="2">
+            <a:schemeClr val="accent1"/>
+          </a:effectRef>
+          <a:fontRef idx="minor">
+            <a:schemeClr val="lt1"/>
+          </a:fontRef>
+        </p:style>
+        <p:txBody>
+          <a:bodyPr rtlCol="0" anchor="ctr" wrap="square" lIns="73152" rIns="73152"/>
+          <a:lstStyle/>
+          <a:p>
+            <a:pPr algn="ctr"/>
+            <a:r>
+              <a:rPr sz="1300">
+                <a:solidFill>
+                  <a:srgbClr val="000000"/>
+                </a:solidFill>
+              </a:rPr>
+              <a:t>Your code runs the tool (weather, trails, conditions, campsites)</a:t>
+            </a:r>
+          </a:p>
+        </p:txBody>
+      </p:sp>
+      <p:sp>
+        <p:nvSpPr>
+          <p:cNvPr id="9" name="Right Arrow 8"/>
+          <p:cNvSpPr/>
+          <p:nvPr/>
+        </p:nvSpPr>
+        <p:spPr>
+          <a:xfrm>
+            <a:off x="5944971" y="2162556"/>
+            <a:ext cx="301752" cy="292608"/>
+          </a:xfrm>
+          <a:prstGeom prst="rightArrow">
+            <a:avLst/>
+          </a:prstGeom>
+          <a:solidFill>
+            <a:srgbClr val="000000"/>
+          </a:solidFill>
+          <a:ln>
+            <a:noFill/>
+          </a:ln>
+          <a:effectLst/>
+        </p:spPr>
+        <p:style>
+          <a:lnRef idx="1">
+            <a:schemeClr val="accent1"/>
+          </a:lnRef>
+          <a:fillRef idx="3">
+            <a:schemeClr val="accent1"/>
+          </a:fillRef>
+          <a:effectRef idx="2">
+            <a:schemeClr val="accent1"/>
+          </a:effectRef>
+          <a:fontRef idx="minor">
+            <a:schemeClr val="lt1"/>
+          </a:fontRef>
+        </p:style>
+        <p:txBody>
+          <a:bodyPr rtlCol="0" anchor="ctr"/>
+          <a:lstStyle/>
+          <a:p>
+            <a:pPr algn="ctr"/>
+          </a:p>
+        </p:txBody>
+      </p:sp>
+      <p:sp>
+        <p:nvSpPr>
+          <p:cNvPr id="10" name="Rounded Rectangle 9"/>
+          <p:cNvSpPr/>
+          <p:nvPr/>
+        </p:nvSpPr>
+        <p:spPr>
+          <a:xfrm>
+            <a:off x="6301587" y="1554480"/>
+            <a:ext cx="1484833" cy="1508760"/>
+          </a:xfrm>
+          <a:prstGeom prst="roundRect">
+            <a:avLst/>
+          </a:prstGeom>
+          <a:noFill/>
+          <a:ln w="19050">
+            <a:solidFill>
+              <a:srgbClr val="000000"/>
+            </a:solidFill>
+          </a:ln>
+          <a:effectLst/>
+        </p:spPr>
+        <p:style>
+          <a:lnRef idx="1">
+            <a:schemeClr val="accent1"/>
+          </a:lnRef>
+          <a:fillRef idx="3">
+            <a:schemeClr val="accent1"/>
+          </a:fillRef>
+          <a:effectRef idx="2">
+            <a:schemeClr val="accent1"/>
+          </a:effectRef>
+          <a:fontRef idx="minor">
+            <a:schemeClr val="lt1"/>
+          </a:fontRef>
+        </p:style>
+        <p:txBody>
+          <a:bodyPr rtlCol="0" anchor="ctr" wrap="square" lIns="73152" rIns="73152"/>
+          <a:lstStyle/>
+          <a:p>
+            <a:pPr algn="ctr"/>
+            <a:r>
+              <a:rPr sz="1300">
+                <a:solidFill>
+                  <a:srgbClr val="000000"/>
+                </a:solidFill>
+              </a:rPr>
+              <a:t>Result appended to the conversation</a:t>
+            </a:r>
+          </a:p>
+        </p:txBody>
+      </p:sp>
+      <p:sp>
+        <p:nvSpPr>
+          <p:cNvPr id="11" name="Right Arrow 10"/>
+          <p:cNvSpPr/>
+          <p:nvPr/>
+        </p:nvSpPr>
+        <p:spPr>
+          <a:xfrm>
+            <a:off x="7841284" y="2162556"/>
+            <a:ext cx="301752" cy="292608"/>
+          </a:xfrm>
+          <a:prstGeom prst="rightArrow">
+            <a:avLst/>
+          </a:prstGeom>
+          <a:solidFill>
+            <a:srgbClr val="000000"/>
+          </a:solidFill>
+          <a:ln>
+            <a:noFill/>
+          </a:ln>
+          <a:effectLst/>
+        </p:spPr>
+        <p:style>
+          <a:lnRef idx="1">
+            <a:schemeClr val="accent1"/>
+          </a:lnRef>
+          <a:fillRef idx="3">
+            <a:schemeClr val="accent1"/>
+          </a:fillRef>
+          <a:effectRef idx="2">
+            <a:schemeClr val="accent1"/>
+          </a:effectRef>
+          <a:fontRef idx="minor">
+            <a:schemeClr val="lt1"/>
+          </a:fontRef>
+        </p:style>
+        <p:txBody>
+          <a:bodyPr rtlCol="0" anchor="ctr"/>
+          <a:lstStyle/>
+          <a:p>
+            <a:pPr algn="ctr"/>
+          </a:p>
+        </p:txBody>
+      </p:sp>
+      <p:sp>
+        <p:nvSpPr>
+          <p:cNvPr id="12" name="Rounded Rectangle 11"/>
+          <p:cNvSpPr/>
+          <p:nvPr/>
+        </p:nvSpPr>
+        <p:spPr>
+          <a:xfrm>
+            <a:off x="8197900" y="1554480"/>
+            <a:ext cx="1484833" cy="1508760"/>
+          </a:xfrm>
+          <a:prstGeom prst="roundRect">
+            <a:avLst/>
+          </a:prstGeom>
+          <a:noFill/>
+          <a:ln w="19050">
+            <a:solidFill>
+              <a:srgbClr val="000000"/>
+            </a:solidFill>
+          </a:ln>
+          <a:effectLst/>
+        </p:spPr>
+        <p:style>
+          <a:lnRef idx="1">
+            <a:schemeClr val="accent1"/>
+          </a:lnRef>
+          <a:fillRef idx="3">
+            <a:schemeClr val="accent1"/>
+          </a:fillRef>
+          <a:effectRef idx="2">
+            <a:schemeClr val="accent1"/>
+          </a:effectRef>
+          <a:fontRef idx="minor">
+            <a:schemeClr val="lt1"/>
+          </a:fontRef>
+        </p:style>
+        <p:txBody>
+          <a:bodyPr rtlCol="0" anchor="ctr" wrap="square" lIns="73152" rIns="73152"/>
+          <a:lstStyle/>
+          <a:p>
+            <a:pPr algn="ctr"/>
+            <a:r>
+              <a:rPr sz="1300">
+                <a:solidFill>
+                  <a:srgbClr val="000000"/>
+                </a:solidFill>
+              </a:rPr>
+              <a:t>Model again, until it answers or hits the step budget</a:t>
+            </a:r>
+          </a:p>
+        </p:txBody>
+      </p:sp>
+      <p:sp>
+        <p:nvSpPr>
+          <p:cNvPr id="13" name="Right Arrow 12"/>
+          <p:cNvSpPr/>
+          <p:nvPr/>
+        </p:nvSpPr>
+        <p:spPr>
+          <a:xfrm>
+            <a:off x="9737597" y="2162556"/>
+            <a:ext cx="301752" cy="292608"/>
+          </a:xfrm>
+          <a:prstGeom prst="rightArrow">
+            <a:avLst/>
+          </a:prstGeom>
+          <a:solidFill>
+            <a:srgbClr val="000000"/>
+          </a:solidFill>
+          <a:ln>
+            <a:noFill/>
+          </a:ln>
+          <a:effectLst/>
+        </p:spPr>
+        <p:style>
+          <a:lnRef idx="1">
+            <a:schemeClr val="accent1"/>
+          </a:lnRef>
+          <a:fillRef idx="3">
+            <a:schemeClr val="accent1"/>
+          </a:fillRef>
+          <a:effectRef idx="2">
+            <a:schemeClr val="accent1"/>
+          </a:effectRef>
+          <a:fontRef idx="minor">
+            <a:schemeClr val="lt1"/>
+          </a:fontRef>
+        </p:style>
+        <p:txBody>
+          <a:bodyPr rtlCol="0" anchor="ctr"/>
+          <a:lstStyle/>
+          <a:p>
+            <a:pPr algn="ctr"/>
+          </a:p>
+        </p:txBody>
+      </p:sp>
+      <p:sp>
+        <p:nvSpPr>
+          <p:cNvPr id="14" name="Rounded Rectangle 13"/>
+          <p:cNvSpPr/>
+          <p:nvPr/>
+        </p:nvSpPr>
+        <p:spPr>
+          <a:xfrm>
+            <a:off x="10094213" y="1554480"/>
+            <a:ext cx="1484833" cy="1508760"/>
+          </a:xfrm>
+          <a:prstGeom prst="roundRect">
+            <a:avLst/>
+          </a:prstGeom>
+          <a:noFill/>
+          <a:ln w="19050">
+            <a:solidFill>
+              <a:srgbClr val="000000"/>
+            </a:solidFill>
+          </a:ln>
+          <a:effectLst/>
+        </p:spPr>
+        <p:style>
+          <a:lnRef idx="1">
+            <a:schemeClr val="accent1"/>
+          </a:lnRef>
+          <a:fillRef idx="3">
+            <a:schemeClr val="accent1"/>
+          </a:fillRef>
+          <a:effectRef idx="2">
+            <a:schemeClr val="accent1"/>
+          </a:effectRef>
+          <a:fontRef idx="minor">
+            <a:schemeClr val="lt1"/>
+          </a:fontRef>
+        </p:style>
+        <p:txBody>
+          <a:bodyPr rtlCol="0" anchor="ctr" wrap="square" lIns="73152" rIns="73152"/>
+          <a:lstStyle/>
+          <a:p>
+            <a:pPr algn="ctr"/>
+            <a:r>
+              <a:rPr sz="1300">
+                <a:solidFill>
+                  <a:srgbClr val="000000"/>
+                </a:solidFill>
+              </a:rPr>
+              <a:t>Itinerary + a full trace</a:t>
             </a:r>
           </a:p>
         </p:txBody>
@@ -4683,7 +5508,7 @@
           <a:lstStyle/>
           <a:p>
             <a:r>
-              <a:t>10 · Reliability Is the Whole Engineering Problem</a:t>
+              <a:t>RAG Fetches Before, an Agent Asks During</a:t>
             </a:r>
           </a:p>
         </p:txBody>
@@ -4700,8 +5525,8 @@
         </p:nvSpPr>
         <p:spPr>
           <a:xfrm>
-            <a:off x="612648" y="1600200"/>
-            <a:ext cx="10966399" cy="4800600"/>
+            <a:off x="612648" y="3749040"/>
+            <a:ext cx="10966399" cy="2743200"/>
           </a:xfrm>
         </p:spPr>
         <p:txBody>
@@ -4710,50 +5535,856 @@
           <a:p>
             <a:pPr/>
             <a:r>
-              <a:rPr sz="2000"/>
-              <a:t>Across roughly two dozen local runs while building this, llama3.2:</a:t>
-            </a:r>
-          </a:p>
-          <a:p>
-            <a:pPr lvl="1"/>
-            <a:r>
-              <a:rPr sz="1800"/>
-              <a:t>called a tool with the literal argument [insert trail IDs here]</a:t>
-            </a:r>
-          </a:p>
-          <a:p>
-            <a:pPr lvl="1"/>
-            <a:r>
-              <a:rPr sz="1800"/>
-              <a:t>announced it had called every tool, then wrote nothing</a:t>
-            </a:r>
-          </a:p>
-          <a:p>
-            <a:pPr lvl="1"/>
-            <a:r>
-              <a:rPr sz="1800"/>
-              <a:t>emitted tool calls as plain text, so none executed</a:t>
-            </a:r>
-          </a:p>
-          <a:p>
-            <a:pPr lvl="1"/>
-            <a:r>
-              <a:rPr sz="1800"/>
-              <a:t>read the reports saying the bridge was out and scheduled the trail anyway</a:t>
+              <a:rPr sz="1600"/>
+              <a:t>RAG: you decide what the model reads, once, up front. Cheap, predictable, one call.</a:t>
             </a:r>
           </a:p>
           <a:p>
             <a:pPr/>
             <a:r>
-              <a:rPr sz="2000"/>
-              <a:t>Before scaffolding: fewer than one run in five reached all four planning tools</a:t>
+              <a:rPr sz="1600"/>
+              <a:t>Agent: the model decides what to fetch, in what order, and when to stop. Flexible, and N times the cost.</a:t>
             </a:r>
           </a:p>
           <a:p>
             <a:pPr/>
             <a:r>
-              <a:rPr sz="2000"/>
-              <a:t>A dropped or malformed tool call doesn't degrade the answer; it breaks the loop</a:t>
+              <a:rPr sz="1600"/>
+              <a:t>Pick the left row whenever you can name the context in advance. Pick the right row when you can't.</a:t>
+            </a:r>
+          </a:p>
+        </p:txBody>
+      </p:sp>
+      <p:sp>
+        <p:nvSpPr>
+          <p:cNvPr id="4" name="TextBox 3"/>
+          <p:cNvSpPr txBox="1"/>
+          <p:nvPr/>
+        </p:nvSpPr>
+        <p:spPr>
+          <a:xfrm>
+            <a:off x="612648" y="1554480"/>
+            <a:ext cx="1371600" cy="822960"/>
+          </a:xfrm>
+          <a:prstGeom prst="rect">
+            <a:avLst/>
+          </a:prstGeom>
+          <a:noFill/>
+        </p:spPr>
+        <p:txBody>
+          <a:bodyPr wrap="square" anchor="ctr">
+            <a:spAutoFit/>
+          </a:bodyPr>
+          <a:lstStyle/>
+          <a:p>
+            <a:r>
+              <a:rPr sz="1400" i="1"/>
+              <a:t>05 RAG</a:t>
+            </a:r>
+          </a:p>
+        </p:txBody>
+      </p:sp>
+      <p:sp>
+        <p:nvSpPr>
+          <p:cNvPr id="5" name="Rounded Rectangle 4"/>
+          <p:cNvSpPr/>
+          <p:nvPr/>
+        </p:nvSpPr>
+        <p:spPr>
+          <a:xfrm>
+            <a:off x="2075688" y="1554480"/>
+            <a:ext cx="2067229" cy="822960"/>
+          </a:xfrm>
+          <a:prstGeom prst="roundRect">
+            <a:avLst/>
+          </a:prstGeom>
+          <a:noFill/>
+          <a:ln w="19050">
+            <a:solidFill>
+              <a:srgbClr val="000000"/>
+            </a:solidFill>
+          </a:ln>
+          <a:effectLst/>
+        </p:spPr>
+        <p:style>
+          <a:lnRef idx="1">
+            <a:schemeClr val="accent1"/>
+          </a:lnRef>
+          <a:fillRef idx="3">
+            <a:schemeClr val="accent1"/>
+          </a:fillRef>
+          <a:effectRef idx="2">
+            <a:schemeClr val="accent1"/>
+          </a:effectRef>
+          <a:fontRef idx="minor">
+            <a:schemeClr val="lt1"/>
+          </a:fontRef>
+        </p:style>
+        <p:txBody>
+          <a:bodyPr rtlCol="0" anchor="ctr" wrap="square" lIns="73152" rIns="73152"/>
+          <a:lstStyle/>
+          <a:p>
+            <a:pPr algn="ctr"/>
+            <a:r>
+              <a:rPr sz="1500">
+                <a:solidFill>
+                  <a:srgbClr val="000000"/>
+                </a:solidFill>
+              </a:rPr>
+              <a:t>Question</a:t>
+            </a:r>
+          </a:p>
+        </p:txBody>
+      </p:sp>
+      <p:sp>
+        <p:nvSpPr>
+          <p:cNvPr id="6" name="Right Arrow 5"/>
+          <p:cNvSpPr/>
+          <p:nvPr/>
+        </p:nvSpPr>
+        <p:spPr>
+          <a:xfrm>
+            <a:off x="4197781" y="1819656"/>
+            <a:ext cx="301752" cy="292608"/>
+          </a:xfrm>
+          <a:prstGeom prst="rightArrow">
+            <a:avLst/>
+          </a:prstGeom>
+          <a:solidFill>
+            <a:srgbClr val="000000"/>
+          </a:solidFill>
+          <a:ln>
+            <a:noFill/>
+          </a:ln>
+          <a:effectLst/>
+        </p:spPr>
+        <p:style>
+          <a:lnRef idx="1">
+            <a:schemeClr val="accent1"/>
+          </a:lnRef>
+          <a:fillRef idx="3">
+            <a:schemeClr val="accent1"/>
+          </a:fillRef>
+          <a:effectRef idx="2">
+            <a:schemeClr val="accent1"/>
+          </a:effectRef>
+          <a:fontRef idx="minor">
+            <a:schemeClr val="lt1"/>
+          </a:fontRef>
+        </p:style>
+        <p:txBody>
+          <a:bodyPr rtlCol="0" anchor="ctr"/>
+          <a:lstStyle/>
+          <a:p>
+            <a:pPr algn="ctr"/>
+          </a:p>
+        </p:txBody>
+      </p:sp>
+      <p:sp>
+        <p:nvSpPr>
+          <p:cNvPr id="7" name="Rounded Rectangle 6"/>
+          <p:cNvSpPr/>
+          <p:nvPr/>
+        </p:nvSpPr>
+        <p:spPr>
+          <a:xfrm>
+            <a:off x="4554397" y="1554480"/>
+            <a:ext cx="2067229" cy="822960"/>
+          </a:xfrm>
+          <a:prstGeom prst="roundRect">
+            <a:avLst/>
+          </a:prstGeom>
+          <a:noFill/>
+          <a:ln w="19050">
+            <a:solidFill>
+              <a:srgbClr val="000000"/>
+            </a:solidFill>
+          </a:ln>
+          <a:effectLst/>
+        </p:spPr>
+        <p:style>
+          <a:lnRef idx="1">
+            <a:schemeClr val="accent1"/>
+          </a:lnRef>
+          <a:fillRef idx="3">
+            <a:schemeClr val="accent1"/>
+          </a:fillRef>
+          <a:effectRef idx="2">
+            <a:schemeClr val="accent1"/>
+          </a:effectRef>
+          <a:fontRef idx="minor">
+            <a:schemeClr val="lt1"/>
+          </a:fontRef>
+        </p:style>
+        <p:txBody>
+          <a:bodyPr rtlCol="0" anchor="ctr" wrap="square" lIns="73152" rIns="73152"/>
+          <a:lstStyle/>
+          <a:p>
+            <a:pPr algn="ctr"/>
+            <a:r>
+              <a:rPr sz="1500">
+                <a:solidFill>
+                  <a:srgbClr val="000000"/>
+                </a:solidFill>
+              </a:rPr>
+              <a:t>Your code retrieves context</a:t>
+            </a:r>
+          </a:p>
+        </p:txBody>
+      </p:sp>
+      <p:sp>
+        <p:nvSpPr>
+          <p:cNvPr id="8" name="Right Arrow 7"/>
+          <p:cNvSpPr/>
+          <p:nvPr/>
+        </p:nvSpPr>
+        <p:spPr>
+          <a:xfrm>
+            <a:off x="6676491" y="1819656"/>
+            <a:ext cx="301752" cy="292608"/>
+          </a:xfrm>
+          <a:prstGeom prst="rightArrow">
+            <a:avLst/>
+          </a:prstGeom>
+          <a:solidFill>
+            <a:srgbClr val="000000"/>
+          </a:solidFill>
+          <a:ln>
+            <a:noFill/>
+          </a:ln>
+          <a:effectLst/>
+        </p:spPr>
+        <p:style>
+          <a:lnRef idx="1">
+            <a:schemeClr val="accent1"/>
+          </a:lnRef>
+          <a:fillRef idx="3">
+            <a:schemeClr val="accent1"/>
+          </a:fillRef>
+          <a:effectRef idx="2">
+            <a:schemeClr val="accent1"/>
+          </a:effectRef>
+          <a:fontRef idx="minor">
+            <a:schemeClr val="lt1"/>
+          </a:fontRef>
+        </p:style>
+        <p:txBody>
+          <a:bodyPr rtlCol="0" anchor="ctr"/>
+          <a:lstStyle/>
+          <a:p>
+            <a:pPr algn="ctr"/>
+          </a:p>
+        </p:txBody>
+      </p:sp>
+      <p:sp>
+        <p:nvSpPr>
+          <p:cNvPr id="9" name="Rounded Rectangle 8"/>
+          <p:cNvSpPr/>
+          <p:nvPr/>
+        </p:nvSpPr>
+        <p:spPr>
+          <a:xfrm>
+            <a:off x="7033107" y="1554480"/>
+            <a:ext cx="2067229" cy="822960"/>
+          </a:xfrm>
+          <a:prstGeom prst="roundRect">
+            <a:avLst/>
+          </a:prstGeom>
+          <a:noFill/>
+          <a:ln w="19050">
+            <a:solidFill>
+              <a:srgbClr val="000000"/>
+            </a:solidFill>
+          </a:ln>
+          <a:effectLst/>
+        </p:spPr>
+        <p:style>
+          <a:lnRef idx="1">
+            <a:schemeClr val="accent1"/>
+          </a:lnRef>
+          <a:fillRef idx="3">
+            <a:schemeClr val="accent1"/>
+          </a:fillRef>
+          <a:effectRef idx="2">
+            <a:schemeClr val="accent1"/>
+          </a:effectRef>
+          <a:fontRef idx="minor">
+            <a:schemeClr val="lt1"/>
+          </a:fontRef>
+        </p:style>
+        <p:txBody>
+          <a:bodyPr rtlCol="0" anchor="ctr" wrap="square" lIns="73152" rIns="73152"/>
+          <a:lstStyle/>
+          <a:p>
+            <a:pPr algn="ctr"/>
+            <a:r>
+              <a:rPr sz="1500">
+                <a:solidFill>
+                  <a:srgbClr val="000000"/>
+                </a:solidFill>
+              </a:rPr>
+              <a:t>Model answers once</a:t>
+            </a:r>
+          </a:p>
+        </p:txBody>
+      </p:sp>
+      <p:sp>
+        <p:nvSpPr>
+          <p:cNvPr id="10" name="Right Arrow 9"/>
+          <p:cNvSpPr/>
+          <p:nvPr/>
+        </p:nvSpPr>
+        <p:spPr>
+          <a:xfrm>
+            <a:off x="9155201" y="1819656"/>
+            <a:ext cx="301752" cy="292608"/>
+          </a:xfrm>
+          <a:prstGeom prst="rightArrow">
+            <a:avLst/>
+          </a:prstGeom>
+          <a:solidFill>
+            <a:srgbClr val="000000"/>
+          </a:solidFill>
+          <a:ln>
+            <a:noFill/>
+          </a:ln>
+          <a:effectLst/>
+        </p:spPr>
+        <p:style>
+          <a:lnRef idx="1">
+            <a:schemeClr val="accent1"/>
+          </a:lnRef>
+          <a:fillRef idx="3">
+            <a:schemeClr val="accent1"/>
+          </a:fillRef>
+          <a:effectRef idx="2">
+            <a:schemeClr val="accent1"/>
+          </a:effectRef>
+          <a:fontRef idx="minor">
+            <a:schemeClr val="lt1"/>
+          </a:fontRef>
+        </p:style>
+        <p:txBody>
+          <a:bodyPr rtlCol="0" anchor="ctr"/>
+          <a:lstStyle/>
+          <a:p>
+            <a:pPr algn="ctr"/>
+          </a:p>
+        </p:txBody>
+      </p:sp>
+      <p:sp>
+        <p:nvSpPr>
+          <p:cNvPr id="11" name="Rounded Rectangle 10"/>
+          <p:cNvSpPr/>
+          <p:nvPr/>
+        </p:nvSpPr>
+        <p:spPr>
+          <a:xfrm>
+            <a:off x="9511817" y="1554480"/>
+            <a:ext cx="2067229" cy="822960"/>
+          </a:xfrm>
+          <a:prstGeom prst="roundRect">
+            <a:avLst/>
+          </a:prstGeom>
+          <a:noFill/>
+          <a:ln w="19050">
+            <a:solidFill>
+              <a:srgbClr val="000000"/>
+            </a:solidFill>
+          </a:ln>
+          <a:effectLst/>
+        </p:spPr>
+        <p:style>
+          <a:lnRef idx="1">
+            <a:schemeClr val="accent1"/>
+          </a:lnRef>
+          <a:fillRef idx="3">
+            <a:schemeClr val="accent1"/>
+          </a:fillRef>
+          <a:effectRef idx="2">
+            <a:schemeClr val="accent1"/>
+          </a:effectRef>
+          <a:fontRef idx="minor">
+            <a:schemeClr val="lt1"/>
+          </a:fontRef>
+        </p:style>
+        <p:txBody>
+          <a:bodyPr rtlCol="0" anchor="ctr" wrap="square" lIns="73152" rIns="73152"/>
+          <a:lstStyle/>
+          <a:p>
+            <a:pPr algn="ctr"/>
+            <a:r>
+              <a:rPr sz="1500">
+                <a:solidFill>
+                  <a:srgbClr val="000000"/>
+                </a:solidFill>
+              </a:rPr>
+              <a:t>Done</a:t>
+            </a:r>
+          </a:p>
+        </p:txBody>
+      </p:sp>
+      <p:sp>
+        <p:nvSpPr>
+          <p:cNvPr id="12" name="TextBox 11"/>
+          <p:cNvSpPr txBox="1"/>
+          <p:nvPr/>
+        </p:nvSpPr>
+        <p:spPr>
+          <a:xfrm>
+            <a:off x="612648" y="2651760"/>
+            <a:ext cx="1371600" cy="822960"/>
+          </a:xfrm>
+          <a:prstGeom prst="rect">
+            <a:avLst/>
+          </a:prstGeom>
+          <a:noFill/>
+        </p:spPr>
+        <p:txBody>
+          <a:bodyPr wrap="square" anchor="ctr">
+            <a:spAutoFit/>
+          </a:bodyPr>
+          <a:lstStyle/>
+          <a:p>
+            <a:r>
+              <a:rPr sz="1400" i="1"/>
+              <a:t>10 Agent</a:t>
+            </a:r>
+          </a:p>
+        </p:txBody>
+      </p:sp>
+      <p:sp>
+        <p:nvSpPr>
+          <p:cNvPr id="13" name="Rounded Rectangle 12"/>
+          <p:cNvSpPr/>
+          <p:nvPr/>
+        </p:nvSpPr>
+        <p:spPr>
+          <a:xfrm>
+            <a:off x="2075688" y="2651760"/>
+            <a:ext cx="1571487" cy="822960"/>
+          </a:xfrm>
+          <a:prstGeom prst="roundRect">
+            <a:avLst/>
+          </a:prstGeom>
+          <a:noFill/>
+          <a:ln w="19050">
+            <a:solidFill>
+              <a:srgbClr val="000000"/>
+            </a:solidFill>
+          </a:ln>
+          <a:effectLst/>
+        </p:spPr>
+        <p:style>
+          <a:lnRef idx="1">
+            <a:schemeClr val="accent1"/>
+          </a:lnRef>
+          <a:fillRef idx="3">
+            <a:schemeClr val="accent1"/>
+          </a:fillRef>
+          <a:effectRef idx="2">
+            <a:schemeClr val="accent1"/>
+          </a:effectRef>
+          <a:fontRef idx="minor">
+            <a:schemeClr val="lt1"/>
+          </a:fontRef>
+        </p:style>
+        <p:txBody>
+          <a:bodyPr rtlCol="0" anchor="ctr" wrap="square" lIns="73152" rIns="73152"/>
+          <a:lstStyle/>
+          <a:p>
+            <a:pPr algn="ctr"/>
+            <a:r>
+              <a:rPr sz="1300">
+                <a:solidFill>
+                  <a:srgbClr val="000000"/>
+                </a:solidFill>
+              </a:rPr>
+              <a:t>Request</a:t>
+            </a:r>
+          </a:p>
+        </p:txBody>
+      </p:sp>
+      <p:sp>
+        <p:nvSpPr>
+          <p:cNvPr id="14" name="Right Arrow 13"/>
+          <p:cNvSpPr/>
+          <p:nvPr/>
+        </p:nvSpPr>
+        <p:spPr>
+          <a:xfrm>
+            <a:off x="3702039" y="2916936"/>
+            <a:ext cx="301752" cy="292608"/>
+          </a:xfrm>
+          <a:prstGeom prst="rightArrow">
+            <a:avLst/>
+          </a:prstGeom>
+          <a:solidFill>
+            <a:srgbClr val="000000"/>
+          </a:solidFill>
+          <a:ln>
+            <a:noFill/>
+          </a:ln>
+          <a:effectLst/>
+        </p:spPr>
+        <p:style>
+          <a:lnRef idx="1">
+            <a:schemeClr val="accent1"/>
+          </a:lnRef>
+          <a:fillRef idx="3">
+            <a:schemeClr val="accent1"/>
+          </a:fillRef>
+          <a:effectRef idx="2">
+            <a:schemeClr val="accent1"/>
+          </a:effectRef>
+          <a:fontRef idx="minor">
+            <a:schemeClr val="lt1"/>
+          </a:fontRef>
+        </p:style>
+        <p:txBody>
+          <a:bodyPr rtlCol="0" anchor="ctr"/>
+          <a:lstStyle/>
+          <a:p>
+            <a:pPr algn="ctr"/>
+          </a:p>
+        </p:txBody>
+      </p:sp>
+      <p:sp>
+        <p:nvSpPr>
+          <p:cNvPr id="15" name="Rounded Rectangle 14"/>
+          <p:cNvSpPr/>
+          <p:nvPr/>
+        </p:nvSpPr>
+        <p:spPr>
+          <a:xfrm>
+            <a:off x="4058655" y="2651760"/>
+            <a:ext cx="1571487" cy="822960"/>
+          </a:xfrm>
+          <a:prstGeom prst="roundRect">
+            <a:avLst/>
+          </a:prstGeom>
+          <a:noFill/>
+          <a:ln w="19050">
+            <a:solidFill>
+              <a:srgbClr val="000000"/>
+            </a:solidFill>
+          </a:ln>
+          <a:effectLst/>
+        </p:spPr>
+        <p:style>
+          <a:lnRef idx="1">
+            <a:schemeClr val="accent1"/>
+          </a:lnRef>
+          <a:fillRef idx="3">
+            <a:schemeClr val="accent1"/>
+          </a:fillRef>
+          <a:effectRef idx="2">
+            <a:schemeClr val="accent1"/>
+          </a:effectRef>
+          <a:fontRef idx="minor">
+            <a:schemeClr val="lt1"/>
+          </a:fontRef>
+        </p:style>
+        <p:txBody>
+          <a:bodyPr rtlCol="0" anchor="ctr" wrap="square" lIns="73152" rIns="73152"/>
+          <a:lstStyle/>
+          <a:p>
+            <a:pPr algn="ctr"/>
+            <a:r>
+              <a:rPr sz="1300">
+                <a:solidFill>
+                  <a:srgbClr val="000000"/>
+                </a:solidFill>
+              </a:rPr>
+              <a:t>Model asks for what it needs</a:t>
+            </a:r>
+          </a:p>
+        </p:txBody>
+      </p:sp>
+      <p:sp>
+        <p:nvSpPr>
+          <p:cNvPr id="16" name="Right Arrow 15"/>
+          <p:cNvSpPr/>
+          <p:nvPr/>
+        </p:nvSpPr>
+        <p:spPr>
+          <a:xfrm>
+            <a:off x="5685007" y="2916936"/>
+            <a:ext cx="301752" cy="292608"/>
+          </a:xfrm>
+          <a:prstGeom prst="rightArrow">
+            <a:avLst/>
+          </a:prstGeom>
+          <a:solidFill>
+            <a:srgbClr val="000000"/>
+          </a:solidFill>
+          <a:ln>
+            <a:noFill/>
+          </a:ln>
+          <a:effectLst/>
+        </p:spPr>
+        <p:style>
+          <a:lnRef idx="1">
+            <a:schemeClr val="accent1"/>
+          </a:lnRef>
+          <a:fillRef idx="3">
+            <a:schemeClr val="accent1"/>
+          </a:fillRef>
+          <a:effectRef idx="2">
+            <a:schemeClr val="accent1"/>
+          </a:effectRef>
+          <a:fontRef idx="minor">
+            <a:schemeClr val="lt1"/>
+          </a:fontRef>
+        </p:style>
+        <p:txBody>
+          <a:bodyPr rtlCol="0" anchor="ctr"/>
+          <a:lstStyle/>
+          <a:p>
+            <a:pPr algn="ctr"/>
+          </a:p>
+        </p:txBody>
+      </p:sp>
+      <p:sp>
+        <p:nvSpPr>
+          <p:cNvPr id="17" name="Rounded Rectangle 16"/>
+          <p:cNvSpPr/>
+          <p:nvPr/>
+        </p:nvSpPr>
+        <p:spPr>
+          <a:xfrm>
+            <a:off x="6041623" y="2651760"/>
+            <a:ext cx="1571487" cy="822960"/>
+          </a:xfrm>
+          <a:prstGeom prst="roundRect">
+            <a:avLst/>
+          </a:prstGeom>
+          <a:noFill/>
+          <a:ln w="19050">
+            <a:solidFill>
+              <a:srgbClr val="000000"/>
+            </a:solidFill>
+          </a:ln>
+          <a:effectLst/>
+        </p:spPr>
+        <p:style>
+          <a:lnRef idx="1">
+            <a:schemeClr val="accent1"/>
+          </a:lnRef>
+          <a:fillRef idx="3">
+            <a:schemeClr val="accent1"/>
+          </a:fillRef>
+          <a:effectRef idx="2">
+            <a:schemeClr val="accent1"/>
+          </a:effectRef>
+          <a:fontRef idx="minor">
+            <a:schemeClr val="lt1"/>
+          </a:fontRef>
+        </p:style>
+        <p:txBody>
+          <a:bodyPr rtlCol="0" anchor="ctr" wrap="square" lIns="73152" rIns="73152"/>
+          <a:lstStyle/>
+          <a:p>
+            <a:pPr algn="ctr"/>
+            <a:r>
+              <a:rPr sz="1300">
+                <a:solidFill>
+                  <a:srgbClr val="000000"/>
+                </a:solidFill>
+              </a:rPr>
+              <a:t>Your code fetches it</a:t>
+            </a:r>
+          </a:p>
+        </p:txBody>
+      </p:sp>
+      <p:sp>
+        <p:nvSpPr>
+          <p:cNvPr id="18" name="Right Arrow 17"/>
+          <p:cNvSpPr/>
+          <p:nvPr/>
+        </p:nvSpPr>
+        <p:spPr>
+          <a:xfrm>
+            <a:off x="7667975" y="2916936"/>
+            <a:ext cx="301752" cy="292608"/>
+          </a:xfrm>
+          <a:prstGeom prst="rightArrow">
+            <a:avLst/>
+          </a:prstGeom>
+          <a:solidFill>
+            <a:srgbClr val="000000"/>
+          </a:solidFill>
+          <a:ln>
+            <a:noFill/>
+          </a:ln>
+          <a:effectLst/>
+        </p:spPr>
+        <p:style>
+          <a:lnRef idx="1">
+            <a:schemeClr val="accent1"/>
+          </a:lnRef>
+          <a:fillRef idx="3">
+            <a:schemeClr val="accent1"/>
+          </a:fillRef>
+          <a:effectRef idx="2">
+            <a:schemeClr val="accent1"/>
+          </a:effectRef>
+          <a:fontRef idx="minor">
+            <a:schemeClr val="lt1"/>
+          </a:fontRef>
+        </p:style>
+        <p:txBody>
+          <a:bodyPr rtlCol="0" anchor="ctr"/>
+          <a:lstStyle/>
+          <a:p>
+            <a:pPr algn="ctr"/>
+          </a:p>
+        </p:txBody>
+      </p:sp>
+      <p:sp>
+        <p:nvSpPr>
+          <p:cNvPr id="19" name="Rounded Rectangle 18"/>
+          <p:cNvSpPr/>
+          <p:nvPr/>
+        </p:nvSpPr>
+        <p:spPr>
+          <a:xfrm>
+            <a:off x="8024591" y="2651760"/>
+            <a:ext cx="1571487" cy="822960"/>
+          </a:xfrm>
+          <a:prstGeom prst="roundRect">
+            <a:avLst/>
+          </a:prstGeom>
+          <a:noFill/>
+          <a:ln w="19050">
+            <a:solidFill>
+              <a:srgbClr val="000000"/>
+            </a:solidFill>
+          </a:ln>
+          <a:effectLst/>
+        </p:spPr>
+        <p:style>
+          <a:lnRef idx="1">
+            <a:schemeClr val="accent1"/>
+          </a:lnRef>
+          <a:fillRef idx="3">
+            <a:schemeClr val="accent1"/>
+          </a:fillRef>
+          <a:effectRef idx="2">
+            <a:schemeClr val="accent1"/>
+          </a:effectRef>
+          <a:fontRef idx="minor">
+            <a:schemeClr val="lt1"/>
+          </a:fontRef>
+        </p:style>
+        <p:txBody>
+          <a:bodyPr rtlCol="0" anchor="ctr" wrap="square" lIns="73152" rIns="73152"/>
+          <a:lstStyle/>
+          <a:p>
+            <a:pPr algn="ctr"/>
+            <a:r>
+              <a:rPr sz="1300">
+                <a:solidFill>
+                  <a:srgbClr val="000000"/>
+                </a:solidFill>
+              </a:rPr>
+              <a:t>Model asks again, or answers</a:t>
+            </a:r>
+          </a:p>
+        </p:txBody>
+      </p:sp>
+      <p:sp>
+        <p:nvSpPr>
+          <p:cNvPr id="20" name="Right Arrow 19"/>
+          <p:cNvSpPr/>
+          <p:nvPr/>
+        </p:nvSpPr>
+        <p:spPr>
+          <a:xfrm>
+            <a:off x="9650943" y="2916936"/>
+            <a:ext cx="301752" cy="292608"/>
+          </a:xfrm>
+          <a:prstGeom prst="rightArrow">
+            <a:avLst/>
+          </a:prstGeom>
+          <a:solidFill>
+            <a:srgbClr val="000000"/>
+          </a:solidFill>
+          <a:ln>
+            <a:noFill/>
+          </a:ln>
+          <a:effectLst/>
+        </p:spPr>
+        <p:style>
+          <a:lnRef idx="1">
+            <a:schemeClr val="accent1"/>
+          </a:lnRef>
+          <a:fillRef idx="3">
+            <a:schemeClr val="accent1"/>
+          </a:fillRef>
+          <a:effectRef idx="2">
+            <a:schemeClr val="accent1"/>
+          </a:effectRef>
+          <a:fontRef idx="minor">
+            <a:schemeClr val="lt1"/>
+          </a:fontRef>
+        </p:style>
+        <p:txBody>
+          <a:bodyPr rtlCol="0" anchor="ctr"/>
+          <a:lstStyle/>
+          <a:p>
+            <a:pPr algn="ctr"/>
+          </a:p>
+        </p:txBody>
+      </p:sp>
+      <p:sp>
+        <p:nvSpPr>
+          <p:cNvPr id="21" name="Rounded Rectangle 20"/>
+          <p:cNvSpPr/>
+          <p:nvPr/>
+        </p:nvSpPr>
+        <p:spPr>
+          <a:xfrm>
+            <a:off x="10007559" y="2651760"/>
+            <a:ext cx="1571487" cy="822960"/>
+          </a:xfrm>
+          <a:prstGeom prst="roundRect">
+            <a:avLst/>
+          </a:prstGeom>
+          <a:noFill/>
+          <a:ln w="19050">
+            <a:solidFill>
+              <a:srgbClr val="000000"/>
+            </a:solidFill>
+          </a:ln>
+          <a:effectLst/>
+        </p:spPr>
+        <p:style>
+          <a:lnRef idx="1">
+            <a:schemeClr val="accent1"/>
+          </a:lnRef>
+          <a:fillRef idx="3">
+            <a:schemeClr val="accent1"/>
+          </a:fillRef>
+          <a:effectRef idx="2">
+            <a:schemeClr val="accent1"/>
+          </a:effectRef>
+          <a:fontRef idx="minor">
+            <a:schemeClr val="lt1"/>
+          </a:fontRef>
+        </p:style>
+        <p:txBody>
+          <a:bodyPr rtlCol="0" anchor="ctr" wrap="square" lIns="73152" rIns="73152"/>
+          <a:lstStyle/>
+          <a:p>
+            <a:pPr algn="ctr"/>
+            <a:r>
+              <a:rPr sz="1300">
+                <a:solidFill>
+                  <a:srgbClr val="000000"/>
+                </a:solidFill>
+              </a:rPr>
+              <a:t>Done, after N turns</a:t>
             </a:r>
           </a:p>
         </p:txBody>
@@ -4797,7 +6428,7 @@
           <a:lstStyle/>
           <a:p>
             <a:r>
-              <a:t>10 · Why This One Pays for a Frontier Model</a:t>
+              <a:t>10 · Demo: What to Watch</a:t>
             </a:r>
           </a:p>
         </p:txBody>
@@ -4815,7 +6446,7 @@
         <p:spPr>
           <a:xfrm>
             <a:off x="612648" y="1600200"/>
-            <a:ext cx="10966399" cy="4800600"/>
+            <a:ext cx="10966399" cy="4892040"/>
           </a:xfrm>
         </p:spPr>
         <p:txBody>
@@ -4825,21 +6456,42 @@
             <a:pPr/>
             <a:r>
               <a:rPr sz="2000"/>
-              <a:t>The only feature today where the workshop pays for a cloud model rather than running local</a:t>
+              <a:t>Plain chat completion first: a lovely generic itinerary that ignores the bridge and books nothing</a:t>
             </a:r>
           </a:p>
           <a:p>
             <a:pPr/>
             <a:r>
               <a:rPr sz="2000"/>
-              <a:t>The reason is the numbers on the previous slide</a:t>
+              <a:t>The five tools as ordinary C# methods over the mock APIs: search_trails, get_weather, get_trail_conditions, check_campsites, request_permit. The descriptions are the model's only manual.</a:t>
             </a:r>
           </a:p>
           <a:p>
             <a:pPr/>
             <a:r>
               <a:rPr sz="2000"/>
-              <a:t>On Azure the loop should sequence all five tools from a single request, with no nudges</a:t>
+              <a:t>Run the agent and narrate the loop: weather, then trails, then a conditions check that discovers the washout and routes around it</a:t>
+            </a:r>
+          </a:p>
+          <a:p>
+            <a:pPr/>
+            <a:r>
+              <a:rPr sz="2000"/>
+              <a:t>Two facts the agent has to discover, not be told: September 16 is the rain day (49/33, 70% precip, 18 mph); Avalanche Lake's bridge is out, and only get_trail_conditions says so</a:t>
+            </a:r>
+          </a:p>
+          <a:p>
+            <a:pPr/>
+            <a:r>
+              <a:rPr sz="2000"/>
+              <a:t>Break something: mark the campsites full, re-run, watch it adapt</a:t>
+            </a:r>
+          </a:p>
+          <a:p>
+            <a:pPr/>
+            <a:r>
+              <a:rPr sz="2000"/>
+              <a:t>The permit hits the 09 gate: summary on screen, wait for a yes</a:t>
             </a:r>
           </a:p>
         </p:txBody>
@@ -4883,7 +6535,7 @@
           <a:lstStyle/>
           <a:p>
             <a:r>
-              <a:t>10 · Leadership Card</a:t>
+              <a:t>10 · Reliability Is the Whole Engineering Problem</a:t>
             </a:r>
           </a:p>
         </p:txBody>
@@ -4901,7 +6553,7 @@
         <p:spPr>
           <a:xfrm>
             <a:off x="612648" y="1600200"/>
-            <a:ext cx="10966399" cy="4800600"/>
+            <a:ext cx="10966399" cy="4892040"/>
           </a:xfrm>
         </p:spPr>
         <p:txBody>
@@ -4911,21 +6563,49 @@
             <a:pPr/>
             <a:r>
               <a:rPr sz="2000"/>
-              <a:t>When: multi-step workflows spanning systems where users state a goal and then do the clicking themselves. Trip planning, onboarding, procurement, incident response, report assembly.</a:t>
+              <a:t>Across roughly two dozen local runs while building this, llama3.2:</a:t>
+            </a:r>
+          </a:p>
+          <a:p>
+            <a:pPr lvl="1"/>
+            <a:r>
+              <a:rPr sz="1800"/>
+              <a:t>called a tool with the literal argument [insert trail IDs here]</a:t>
+            </a:r>
+          </a:p>
+          <a:p>
+            <a:pPr lvl="1"/>
+            <a:r>
+              <a:rPr sz="1800"/>
+              <a:t>announced it had called every tool, then wrote nothing</a:t>
+            </a:r>
+          </a:p>
+          <a:p>
+            <a:pPr lvl="1"/>
+            <a:r>
+              <a:rPr sz="1800"/>
+              <a:t>emitted tool calls as plain text, so none executed</a:t>
+            </a:r>
+          </a:p>
+          <a:p>
+            <a:pPr lvl="1"/>
+            <a:r>
+              <a:rPr sz="1800"/>
+              <a:t>read the reports saying the bridge was out and scheduled the trail anyway</a:t>
             </a:r>
           </a:p>
           <a:p>
             <a:pPr/>
             <a:r>
               <a:rPr sz="2000"/>
-              <a:t>Cost: the highest of the ten. Weeks to months, frontier-model API costs, real design work on guardrails, confirmation gates, observability. Do one of 01 to 09 first.</a:t>
+              <a:t>Before scaffolding: fewer than one run in five reached all four planning tools</a:t>
             </a:r>
           </a:p>
           <a:p>
             <a:pPr/>
             <a:r>
               <a:rPr sz="2000"/>
-              <a:t>"Users state the goal in one sentence, the software does the clicking, and a human still signs off on anything that matters."</a:t>
+              <a:t>A dropped or malformed tool call doesn't degrade the answer; it breaks the loop</a:t>
             </a:r>
           </a:p>
         </p:txBody>

--- a/docs/slides/pptx/M4-doing.pptx
+++ b/docs/slides/pptx/M4-doing.pptx
@@ -3309,7 +3309,16 @@
               <a:t>dotnet/F10-dotnet.md</a:t>
             </a:r>
             <a:r>
-              <a:t>. The reliability story, spoken over the scrolling trace: local </a:t>
+              <a:t>. Soak-tested 2026-09-03, 10 of 10 on both the default and the washout request. Two things the room may see: the rain day sometimes gets a moderate hike rather than an easy one (3 of 10 runs, the hard hike still lands on a dry day; say "it shaped the plan, it didn't perfect it"), and </a:t>
+            </a:r>
+            <a:r>
+              <a:rPr>
+                <a:latin typeface="Consolas"/>
+              </a:rPr>
+              <a:t>search_trails</a:t>
+            </a:r>
+            <a:r>
+              <a:t> keywords match trail names on purpose, because Avalanche Lake sits past the 8-result cap and without the name match the agent cannot reach it. If the agent ever says it could not find the trail, that is the tool's fault, not the model's, and it is a better lesson than the bridge. The reliability story, spoken over the scrolling trace: local </a:t>
             </a:r>
             <a:r>
               <a:rPr>

--- a/docs/slides/pptx/M4-doing.pptx
+++ b/docs/slides/pptx/M4-doing.pptx
@@ -3318,7 +3318,7 @@
               <a:t>search_trails</a:t>
             </a:r>
             <a:r>
-              <a:t> keywords match trail names on purpose, because Avalanche Lake sits past the 8-result cap and without the name match the agent cannot reach it. If the agent ever says it could not find the trail, that is the tool's fault, not the model's, and it is a better lesson than the bridge. The reliability story, spoken over the scrolling trace: local </a:t>
+              <a:t> keywords match trail names on purpose, because Avalanche Lake sits past the 8-result cap and without the name match the agent cannot reach it. If the agent ever says it could not find the trail, the search tool is the reason, and that makes a better lesson than the bridge. The reliability story, spoken over the scrolling trace: local </a:t>
             </a:r>
             <a:r>
               <a:rPr>
@@ -3327,7 +3327,7 @@
               <a:t>llama3.2</a:t>
             </a:r>
             <a:r>
-              <a:t> across ~two dozen runs called a tool with the literal argument "[insert trail IDs here]", announced it had called every tool then wrote nothing, emitted tool calls as plain text so none executed, and read "bridge is OUT" and scheduled the trail anyway — fewer than one run in five reached all four planning tools before scaffolding. That is why this is the one feature of the day that pays for a frontier model, and why the guardrails aren't optional: a malformed call breaks the loop, not the answer.</a:t>
+              <a:t> across ~two dozen runs called a tool with the literal argument "[insert trail IDs here]", announced it had called every tool then wrote nothing, emitted tool calls as plain text so none executed, and read "bridge is OUT" and scheduled the trail anyway. Fewer than one run in five reached all four planning tools before scaffolding. That is why this is the one feature of the day that pays for a frontier model, and why the guardrails aren't optional: a malformed call breaks the loop, not the answer.</a:t>
             </a:r>
           </a:p>
           <a:p>

--- a/docs/slides/pptx/M4-doing.pptx
+++ b/docs/slides/pptx/M4-doing.pptx
@@ -2294,21 +2294,7 @@
           <a:lstStyle/>
           <a:p>
             <a:r>
-              <a:t>An agent is a model given tools and a goal, running in a loop. The model only ever returns "call this with these arguments" or a final answer; your code stays in charge of doing. Build the loop box by box, then trace one iteration with your finger: model, tool, result back in, model. The loop runs seven or eight times for this request.</a:t>
-            </a:r>
-          </a:p>
-          <a:p>
-            <a:r>
-              <a:t>The guardrails, spoken while pointing: a step budget of 12 so it cannot loop forever, a confirmation gate before </a:t>
-            </a:r>
-            <a:r>
-              <a:rPr>
-                <a:latin typeface="Consolas"/>
-              </a:rPr>
-              <a:t>request_permit</a:t>
-            </a:r>
-            <a:r>
-              <a:t>, tools that return errors instead of throwing, and every call/args/result printed as the loop runs. Be precise: the demo prints the trace, it does not persist one — shipping this means durable storage next to 09's approval record, and that pair is what you show your security team.</a:t>
+              <a:t>Your code runs the tool: weather, trails, conditions, campsites. Your code stays in charge of doing.</a:t>
             </a:r>
           </a:p>
         </p:txBody>
@@ -2378,21 +2364,7 @@
           <a:lstStyle/>
           <a:p>
             <a:r>
-              <a:t>An agent is a model given tools and a goal, running in a loop. The model only ever returns "call this with these arguments" or a final answer; your code stays in charge of doing. Build the loop box by box, then trace one iteration with your finger: model, tool, result back in, model. The loop runs seven or eight times for this request.</a:t>
-            </a:r>
-          </a:p>
-          <a:p>
-            <a:r>
-              <a:t>The guardrails, spoken while pointing: a step budget of 12 so it cannot loop forever, a confirmation gate before </a:t>
-            </a:r>
-            <a:r>
-              <a:rPr>
-                <a:latin typeface="Consolas"/>
-              </a:rPr>
-              <a:t>request_permit</a:t>
-            </a:r>
-            <a:r>
-              <a:t>, tools that return errors instead of throwing, and every call/args/result printed as the loop runs. Be precise: the demo prints the trace, it does not persist one — shipping this means durable storage next to 09's approval record, and that pair is what you show your security team.</a:t>
+              <a:t>The result is appended to the conversation.</a:t>
             </a:r>
           </a:p>
         </p:txBody>
@@ -2462,21 +2434,7 @@
           <a:lstStyle/>
           <a:p>
             <a:r>
-              <a:t>An agent is a model given tools and a goal, running in a loop. The model only ever returns "call this with these arguments" or a final answer; your code stays in charge of doing. Build the loop box by box, then trace one iteration with your finger: model, tool, result back in, model. The loop runs seven or eight times for this request.</a:t>
-            </a:r>
-          </a:p>
-          <a:p>
-            <a:r>
-              <a:t>The guardrails, spoken while pointing: a step budget of 12 so it cannot loop forever, a confirmation gate before </a:t>
-            </a:r>
-            <a:r>
-              <a:rPr>
-                <a:latin typeface="Consolas"/>
-              </a:rPr>
-              <a:t>request_permit</a:t>
-            </a:r>
-            <a:r>
-              <a:t>, tools that return errors instead of throwing, and every call/args/result printed as the loop runs. Be precise: the demo prints the trace, it does not persist one — shipping this means durable storage next to 09's approval record, and that pair is what you show your security team.</a:t>
+              <a:t>The model again, until it answers or hits the step budget. Trace one iteration with your finger: model, tool, result back in, model. The loop runs seven or eight times for this request.</a:t>
             </a:r>
           </a:p>
         </p:txBody>
@@ -2546,21 +2504,7 @@
           <a:lstStyle/>
           <a:p>
             <a:r>
-              <a:t>An agent is a model given tools and a goal, running in a loop. The model only ever returns "call this with these arguments" or a final answer; your code stays in charge of doing. Build the loop box by box, then trace one iteration with your finger: model, tool, result back in, model. The loop runs seven or eight times for this request.</a:t>
-            </a:r>
-          </a:p>
-          <a:p>
-            <a:r>
-              <a:t>The guardrails, spoken while pointing: a step budget of 12 so it cannot loop forever, a confirmation gate before </a:t>
-            </a:r>
-            <a:r>
-              <a:rPr>
-                <a:latin typeface="Consolas"/>
-              </a:rPr>
-              <a:t>request_permit</a:t>
-            </a:r>
-            <a:r>
-              <a:t>, tools that return errors instead of throwing, and every call/args/result printed as the loop runs. Be precise: the demo prints the trace, it does not persist one — shipping this means durable storage next to 09's approval record, and that pair is what you show your security team.</a:t>
+              <a:t>Out comes an itinerary and a full trace.</a:t>
             </a:r>
           </a:p>
         </p:txBody>
@@ -2630,21 +2574,7 @@
           <a:lstStyle/>
           <a:p>
             <a:r>
-              <a:t>An agent is a model given tools and a goal, running in a loop. The model only ever returns "call this with these arguments" or a final answer; your code stays in charge of doing. Build the loop box by box, then trace one iteration with your finger: model, tool, result back in, model. The loop runs seven or eight times for this request.</a:t>
-            </a:r>
-          </a:p>
-          <a:p>
-            <a:r>
-              <a:t>The guardrails, spoken while pointing: a step budget of 12 so it cannot loop forever, a confirmation gate before </a:t>
-            </a:r>
-            <a:r>
-              <a:rPr>
-                <a:latin typeface="Consolas"/>
-              </a:rPr>
-              <a:t>request_permit</a:t>
-            </a:r>
-            <a:r>
-              <a:t>, tools that return errors instead of throwing, and every call/args/result printed as the loop runs. Be precise: the demo prints the trace, it does not persist one — shipping this means durable storage next to 09's approval record, and that pair is what you show your security team.</a:t>
+              <a:t>The loop is your code. Not a framework, not the model.</a:t>
             </a:r>
           </a:p>
         </p:txBody>
@@ -2714,21 +2644,7 @@
           <a:lstStyle/>
           <a:p>
             <a:r>
-              <a:t>An agent is a model given tools and a goal, running in a loop. The model only ever returns "call this with these arguments" or a final answer; your code stays in charge of doing. Build the loop box by box, then trace one iteration with your finger: model, tool, result back in, model. The loop runs seven or eight times for this request.</a:t>
-            </a:r>
-          </a:p>
-          <a:p>
-            <a:r>
-              <a:t>The guardrails, spoken while pointing: a step budget of 12 so it cannot loop forever, a confirmation gate before </a:t>
-            </a:r>
-            <a:r>
-              <a:rPr>
-                <a:latin typeface="Consolas"/>
-              </a:rPr>
-              <a:t>request_permit</a:t>
-            </a:r>
-            <a:r>
-              <a:t>, tools that return errors instead of throwing, and every call/args/result printed as the loop runs. Be precise: the demo prints the trace, it does not persist one — shipping this means durable storage next to 09's approval record, and that pair is what you show your security team.</a:t>
+              <a:t>The descriptions are the model's manual. They are the only thing it knows about your tools.</a:t>
             </a:r>
           </a:p>
         </p:txBody>
@@ -2798,12 +2714,7 @@
           <a:lstStyle/>
           <a:p>
             <a:r>
-              <a:t>An agent is a model given tools and a goal, running in a loop. The model only ever returns "call this with these arguments" or a final answer; your code stays in charge of doing. Build the loop box by box, then trace one iteration with your finger: model, tool, result back in, model. The loop runs seven or eight times for this request.</a:t>
-            </a:r>
-          </a:p>
-          <a:p>
-            <a:r>
-              <a:t>The guardrails, spoken while pointing: a step budget of 12 so it cannot loop forever, a confirmation gate before </a:t>
+              <a:t>Guardrails are boxes on this line, spoken while pointing: a step budget of 12 so it cannot loop forever, a confirmation gate before </a:t>
             </a:r>
             <a:r>
               <a:rPr>
@@ -2812,7 +2723,7 @@
               <a:t>request_permit</a:t>
             </a:r>
             <a:r>
-              <a:t>, tools that return errors instead of throwing, and every call/args/result printed as the loop runs. Be precise: the demo prints the trace, it does not persist one — shipping this means durable storage next to 09's approval record, and that pair is what you show your security team.</a:t>
+              <a:t>, tools that return errors instead of throwing, and every call/args/result printed as the loop runs. Be precise: the demo prints the trace, it does not persist one. Shipping this means durable storage next to 09's approval record, and that pair is what you show your security team.</a:t>
             </a:r>
           </a:p>
         </p:txBody>
@@ -2882,7 +2793,12 @@
           <a:lstStyle/>
           <a:p>
             <a:r>
-              <a:t>One row per advance. This is the "why not just RAG" slide. The trip request needs weather before it can pick a trail and conditions before it can book, and nobody knows that order up front. That is the whole case for the loop.</a:t>
+              <a:t>One row per advance. This is the "why not just RAG" slide.</a:t>
+            </a:r>
+          </a:p>
+          <a:p>
+            <a:r>
+              <a:t>RAG: your code retrieves the context, the model answers once, done.</a:t>
             </a:r>
           </a:p>
         </p:txBody>
@@ -2952,7 +2868,7 @@
           <a:lstStyle/>
           <a:p>
             <a:r>
-              <a:t>One row per advance. This is the "why not just RAG" slide. The trip request needs weather before it can pick a trail and conditions before it can book, and nobody knows that order up front. That is the whole case for the loop.</a:t>
+              <a:t>Agent: the model asks for what it needs, your code fetches it, the model asks again or answers. Done after N turns.</a:t>
             </a:r>
           </a:p>
         </p:txBody>
@@ -3022,7 +2938,7 @@
           <a:lstStyle/>
           <a:p>
             <a:r>
-              <a:t>One row per advance. This is the "why not just RAG" slide. The trip request needs weather before it can pick a trail and conditions before it can book, and nobody knows that order up front. That is the whole case for the loop.</a:t>
+              <a:t>RAG: you pick the context, once, and pay for one call.</a:t>
             </a:r>
           </a:p>
         </p:txBody>
@@ -3092,7 +3008,7 @@
           <a:lstStyle/>
           <a:p>
             <a:r>
-              <a:t>One row per advance. This is the "why not just RAG" slide. The trip request needs weather before it can pick a trail and conditions before it can book, and nobody knows that order up front. That is the whole case for the loop.</a:t>
+              <a:t>Agent: the model picks, repeatedly, and you pay N times.</a:t>
             </a:r>
           </a:p>
         </p:txBody>
@@ -3162,7 +3078,7 @@
           <a:lstStyle/>
           <a:p>
             <a:r>
-              <a:t>One row per advance. This is the "why not just RAG" slide. The trip request needs weather before it can pick a trail and conditions before it can book, and nobody knows that order up front. That is the whole case for the loop.</a:t>
+              <a:t>Can you name the context up front? Then RAG. The trip request needs weather before it can pick a trail and conditions before it can book, and nobody knows that order up front. That is the whole case for the loop.</a:t>
             </a:r>
           </a:p>
         </p:txBody>
@@ -3232,200 +3148,134 @@
           <a:lstStyle/>
           <a:p>
             <a:r>
-              <a:t>The five tools: </a:t>
+              <a:t>~7 min · Terminal 1 (Azure, </a:t>
             </a:r>
             <a:r>
               <a:rPr>
                 <a:latin typeface="Consolas"/>
               </a:rPr>
-              <a:t>search_trails</a:t>
-            </a:r>
-            <a:r>
-              <a:t>, </a:t>
+              <a:t>AZURE_OPENAI_DEPLOYMENT=gpt-5.5</a:t>
+            </a:r>
+            <a:r>
+              <a:t>) · </a:t>
             </a:r>
             <a:r>
               <a:rPr>
                 <a:latin typeface="Consolas"/>
               </a:rPr>
-              <a:t>get_weather</a:t>
-            </a:r>
-            <a:r>
-              <a:t>, </a:t>
+              <a:t>cd modules/M4-doing/F10-agentic-workflows/dotnet</a:t>
+            </a:r>
+          </a:p>
+          <a:p>
+            <a:r>
+              <a:t>Files: </a:t>
             </a:r>
             <a:r>
               <a:rPr>
                 <a:latin typeface="Consolas"/>
               </a:rPr>
-              <a:t>get_trail_conditions</a:t>
-            </a:r>
-            <a:r>
-              <a:t>, </a:t>
+              <a:t>trails.json</a:t>
+            </a:r>
+            <a:r>
+              <a:t> = 200 trails · </a:t>
             </a:r>
             <a:r>
               <a:rPr>
                 <a:latin typeface="Consolas"/>
               </a:rPr>
-              <a:t>check_campsites</a:t>
-            </a:r>
-            <a:r>
-              <a:t>, </a:t>
+              <a:t>condition-reports.jsonl</a:t>
+            </a:r>
+            <a:r>
+              <a:t> = 08's stream, the bridge is in it · </a:t>
             </a:r>
             <a:r>
               <a:rPr>
                 <a:latin typeface="Consolas"/>
               </a:rPr>
-              <a:t>request_permit</a:t>
-            </a:r>
-            <a:r>
-              <a:t>. The two facts it has to discover, not be told: September 16 is the rain day (49/33, 70% precip, 18 mph), and Avalanche Lake's bridge is out — only </a:t>
+              <a:t>mock-apis/</a:t>
+            </a:r>
+            <a:r>
+              <a:t> = weather, campsites, permits as JSON</a:t>
+            </a:r>
+          </a:p>
+          <a:p>
+            <a:r>
+              <a:t>Flags: </a:t>
             </a:r>
             <a:r>
               <a:rPr>
                 <a:latin typeface="Consolas"/>
               </a:rPr>
-              <a:t>get_trail_conditions</a:t>
-            </a:r>
-            <a:r>
-              <a:t> says so.</a:t>
-            </a:r>
-          </a:p>
-          <a:p>
-            <a:r>
-              <a:t>Run it against </a:t>
+              <a:t>--yes</a:t>
+            </a:r>
+            <a:r>
+              <a:t> = auto-approve the permit gate · any other words = your own request (default: 3 days in Glacier, Sept 14 to 16)</a:t>
+            </a:r>
+          </a:p>
+          <a:p>
+            <a:r>
+              <a:t>1. Before: </a:t>
             </a:r>
             <a:r>
               <a:rPr>
                 <a:latin typeface="Consolas"/>
               </a:rPr>
-              <a:t>gpt-5.5</a:t>
-            </a:r>
-            <a:r>
-              <a:t> on Foundry; measured behavior (7 to 8 calls, zero nudges) is in </a:t>
+              <a:t>cd starter &amp;&amp; dotnet run</a:t>
+            </a:r>
+            <a:r>
+              <a:t>. The same request, no tools. Lovely, generic, books nothing.</a:t>
+            </a:r>
+          </a:p>
+          <a:p>
+            <a:r>
+              <a:t>2. Show the five methods in </a:t>
             </a:r>
             <a:r>
               <a:rPr>
                 <a:latin typeface="Consolas"/>
               </a:rPr>
-              <a:t>dotnet/F10-dotnet.md</a:t>
-            </a:r>
-            <a:r>
-              <a:t>. Soak-tested 2026-09-03, 10 of 10 on both the default and the washout request. Two things the room may see: the rain day sometimes gets a moderate hike rather than an easy one (3 of 10 runs, the hard hike still lands on a dry day; say "it shaped the plan, it didn't perfect it"), and </a:t>
+              <a:t>complete/Program.cs</a:t>
+            </a:r>
+            <a:r>
+              <a:t>. The descriptions are the manual.</a:t>
+            </a:r>
+          </a:p>
+          <a:p>
+            <a:r>
+              <a:t>3. After: </a:t>
             </a:r>
             <a:r>
               <a:rPr>
                 <a:latin typeface="Consolas"/>
               </a:rPr>
-              <a:t>search_trails</a:t>
-            </a:r>
-            <a:r>
-              <a:t> keywords match trail names on purpose, because Avalanche Lake sits past the 8-result cap and without the name match the agent cannot reach it. If the agent ever says it could not find the trail, the search tool is the reason, and that makes a better lesson than the bridge. The reliability story, spoken over the scrolling trace: local </a:t>
+              <a:t>cd ../complete &amp;&amp; dotnet run</a:t>
+            </a:r>
+            <a:r>
+              <a:t>. Narrate the trace. Weather, trails, conditions per trail, campsites. It stops at the permit gate; say yes.</a:t>
+            </a:r>
+          </a:p>
+          <a:p>
+            <a:r>
+              <a:t>4. </a:t>
             </a:r>
             <a:r>
               <a:rPr>
                 <a:latin typeface="Consolas"/>
               </a:rPr>
-              <a:t>llama3.2</a:t>
-            </a:r>
-            <a:r>
-              <a:t> across ~two dozen runs called a tool with the literal argument "[insert trail IDs here]", announced it had called every tool then wrote nothing, emitted tool calls as plain text so none executed, and read "bridge is OUT" and scheduled the trail anyway. Fewer than one run in five reached all four planning tools before scaffolding. That is why this is the one feature of the day that pays for a frontier model, and why the guardrails aren't optional: a malformed call breaks the loop, not the answer.</a:t>
-            </a:r>
-          </a:p>
-          <a:p>
-            <a:r>
-              <a:t>Demo script (~7 min; step 4 is the first cut):</a:t>
-            </a:r>
-          </a:p>
-          <a:p>
-            <a:r>
-              <a:t>1. Type the trip request into a plain chat completion first. You get a lovely generic itinerary that ignores the washed-out bridge and books nothing, which is the reason this feature exists.</a:t>
-            </a:r>
-          </a:p>
-          <a:p>
-            <a:r>
-              <a:t>2. Show the five tools as ordinary C# methods over the mock APIs in </a:t>
-            </a:r>
-            <a:r>
-              <a:rPr>
-                <a:latin typeface="Consolas"/>
-              </a:rPr>
-              <a:t>data/mock-apis/</a:t>
-            </a:r>
-            <a:r>
-              <a:t> and the corpus: </a:t>
-            </a:r>
-            <a:r>
-              <a:rPr>
-                <a:latin typeface="Consolas"/>
-              </a:rPr>
-              <a:t>search_trails</a:t>
-            </a:r>
-            <a:r>
-              <a:t>, </a:t>
-            </a:r>
-            <a:r>
-              <a:rPr>
-                <a:latin typeface="Consolas"/>
-              </a:rPr>
-              <a:t>get_weather</a:t>
-            </a:r>
-            <a:r>
-              <a:t>, </a:t>
-            </a:r>
-            <a:r>
-              <a:rPr>
-                <a:latin typeface="Consolas"/>
-              </a:rPr>
-              <a:t>check_campsites</a:t>
-            </a:r>
-            <a:r>
-              <a:t>, </a:t>
-            </a:r>
-            <a:r>
-              <a:rPr>
-                <a:latin typeface="Consolas"/>
-              </a:rPr>
-              <a:t>request_permit</a:t>
-            </a:r>
-            <a:r>
-              <a:t>, and </a:t>
-            </a:r>
-            <a:r>
-              <a:rPr>
-                <a:latin typeface="Consolas"/>
-              </a:rPr>
-              <a:t>get_trail_conditions</a:t>
-            </a:r>
-            <a:r>
-              <a:t>. Register them with Microsoft.Extensions.AI's function-calling support; the descriptions you write are the model's only manual. </a:t>
-            </a:r>
-            <a:r>
-              <a:rPr>
-                <a:latin typeface="Consolas"/>
-              </a:rPr>
-              <a:t>get_trail_conditions</a:t>
-            </a:r>
-            <a:r>
-              <a:t> reads the same condition reports feature 08 mined, which is how the agent can find out a bridge is gone.</a:t>
-            </a:r>
-          </a:p>
-          <a:p>
-            <a:r>
-              <a:t>3. Run the agent and narrate the loop live as each call scrolls past: weather first, then trail search, then a conditions check that discovers the feature 08 bridge washout and routes around it. The payoff is watching the model sequence tools nobody ordered it to sequence.</a:t>
-            </a:r>
-          </a:p>
-          <a:p>
-            <a:r>
-              <a:t>4. Show the full trace, then break something on purpose: mark the campsites full and re-run. The agent adapts and proposes different dates.</a:t>
-            </a:r>
-          </a:p>
-          <a:p>
-            <a:r>
-              <a:t>5. The permit step hits the feature 09 gate: the agent pauses, presents the summary, and waits for a human yes before filing. Show the step budget in the loop while you're there.</a:t>
-            </a:r>
-          </a:p>
-          <a:p>
-            <a:r>
-              <a:t>6. Close on the trace as an artifact: every tool call, its arguments, and its result printed as the loop runs, so every decision is inspectable rather than mysterious. Be precise about what this demo does and doesn't do: it prints the trace, and it does not persist one. Shipping this means writing that trace to durable storage alongside the approval record from feature 09, and that pair is what you show your security team when they ask whether this thing is safe.</a:t>
+              <a:t>dotnet run -- "Plan me a 2-day trip in Glacier National Park for September 14-15 that includes the Avalanche Lake Trail (trail-0117)."</a:t>
+            </a:r>
+            <a:r>
+              <a:t>: it reads the bridge report and routes around it.</a:t>
+            </a:r>
+          </a:p>
+          <a:p>
+            <a:r>
+              <a:t>5. Point at the step budget and the trace. Printed, not persisted. Say so.</a:t>
+            </a:r>
+          </a:p>
+          <a:p>
+            <a:r>
+              <a:t>Cut: 4 if the first run already hit the bridge.</a:t>
             </a:r>
           </a:p>
         </p:txBody>
@@ -3591,16 +3441,6 @@
               <a:t>Trip planning, onboarding, procurement, incident response, report assembly.</a:t>
             </a:r>
           </a:p>
-          <a:p>
-            <a:r>
-              <a:t>If asked about cost: the highest of the ten — weeks to months, frontier-model API costs, real design work on guardrails, confirmation gates, observability. Do one of 01–09 first.</a:t>
-            </a:r>
-          </a:p>
-          <a:p>
-            <a:r>
-              <a:t>On Azure the loop sequences all five tools from a single request with zero nudges, in all three languages — measured against the workshop's Foundry deployment; the contrast with the local counts is the argument. Row 10, and the one your board has already asked about.</a:t>
-            </a:r>
-          </a:p>
         </p:txBody>
       </p:sp>
       <p:sp>
@@ -3668,17 +3508,7 @@
           <a:lstStyle/>
           <a:p>
             <a:r>
-              <a:t>Trip planning, onboarding, procurement, incident response, report assembly.</a:t>
-            </a:r>
-          </a:p>
-          <a:p>
-            <a:r>
-              <a:t>If asked about cost: the highest of the ten — weeks to months, frontier-model API costs, real design work on guardrails, confirmation gates, observability. Do one of 01–09 first.</a:t>
-            </a:r>
-          </a:p>
-          <a:p>
-            <a:r>
-              <a:t>On Azure the loop sequences all five tools from a single request with zero nudges, in all three languages — measured against the workshop's Foundry deployment; the contrast with the local counts is the argument. Row 10, and the one your board has already asked about.</a:t>
+              <a:t>The line for your boss. On Azure the loop sequences all five tools from a single request with zero nudges, in all three languages, measured against the workshop's Foundry deployment; the contrast with the local counts is the argument. Row 10, and the one your board has already asked about.</a:t>
             </a:r>
           </a:p>
         </p:txBody>
@@ -3748,17 +3578,7 @@
           <a:lstStyle/>
           <a:p>
             <a:r>
-              <a:t>Trip planning, onboarding, procurement, incident response, report assembly.</a:t>
-            </a:r>
-          </a:p>
-          <a:p>
-            <a:r>
-              <a:t>If asked about cost: the highest of the ten — weeks to months, frontier-model API costs, real design work on guardrails, confirmation gates, observability. Do one of 01–09 first.</a:t>
-            </a:r>
-          </a:p>
-          <a:p>
-            <a:r>
-              <a:t>On Azure the loop sequences all five tools from a single request with zero nudges, in all three languages — measured against the workshop's Foundry deployment; the contrast with the local counts is the argument. Row 10, and the one your board has already asked about.</a:t>
+              <a:t>Hard. If asked about cost: the highest of the ten. Weeks to months, frontier-model API costs, real design work on guardrails, confirmation gates, observability. Do one of 01 through 09 first.</a:t>
             </a:r>
           </a:p>
         </p:txBody>
@@ -3903,21 +3723,7 @@
           <a:lstStyle/>
           <a:p>
             <a:r>
-              <a:t>An agent is a model given tools and a goal, running in a loop. The model only ever returns "call this with these arguments" or a final answer; your code stays in charge of doing. Build the loop box by box, then trace one iteration with your finger: model, tool, result back in, model. The loop runs seven or eight times for this request.</a:t>
-            </a:r>
-          </a:p>
-          <a:p>
-            <a:r>
-              <a:t>The guardrails, spoken while pointing: a step budget of 12 so it cannot loop forever, a confirmation gate before </a:t>
-            </a:r>
-            <a:r>
-              <a:rPr>
-                <a:latin typeface="Consolas"/>
-              </a:rPr>
-              <a:t>request_permit</a:t>
-            </a:r>
-            <a:r>
-              <a:t>, tools that return errors instead of throwing, and every call/args/result printed as the loop runs. Be precise: the demo prints the trace, it does not persist one — shipping this means durable storage next to 09's approval record, and that pair is what you show your security team.</a:t>
+              <a:t>The model only ever returns one of two things: "call this tool with these arguments," or a final answer.</a:t>
             </a:r>
           </a:p>
         </p:txBody>
@@ -3987,21 +3793,7 @@
           <a:lstStyle/>
           <a:p>
             <a:r>
-              <a:t>An agent is a model given tools and a goal, running in a loop. The model only ever returns "call this with these arguments" or a final answer; your code stays in charge of doing. Build the loop box by box, then trace one iteration with your finger: model, tool, result back in, model. The loop runs seven or eight times for this request.</a:t>
-            </a:r>
-          </a:p>
-          <a:p>
-            <a:r>
-              <a:t>The guardrails, spoken while pointing: a step budget of 12 so it cannot loop forever, a confirmation gate before </a:t>
-            </a:r>
-            <a:r>
-              <a:rPr>
-                <a:latin typeface="Consolas"/>
-              </a:rPr>
-              <a:t>request_permit</a:t>
-            </a:r>
-            <a:r>
-              <a:t>, tools that return errors instead of throwing, and every call/args/result printed as the loop runs. Be precise: the demo prints the trace, it does not persist one — shipping this means durable storage next to 09's approval record, and that pair is what you show your security team.</a:t>
+              <a:t>An agent is a model given tools and a goal, running in a loop. Build the loop box by box. It starts with the trip request and the tool descriptions, sent together.</a:t>
             </a:r>
           </a:p>
         </p:txBody>

--- a/docs/slides/pptx/M4-doing.pptx
+++ b/docs/slides/pptx/M4-doing.pptx
@@ -3148,7 +3148,7 @@
           <a:lstStyle/>
           <a:p>
             <a:r>
-              <a:t>~7 min · Terminal 1 (Azure, </a:t>
+              <a:t>~7 min · prefix every run with </a:t>
             </a:r>
             <a:r>
               <a:rPr>
@@ -3157,7 +3157,7 @@
               <a:t>AZURE_OPENAI_DEPLOYMENT=gpt-5.5</a:t>
             </a:r>
             <a:r>
-              <a:t>) · </a:t>
+              <a:t> · </a:t>
             </a:r>
             <a:r>
               <a:rPr>
